--- a/presentation/Supply_Chain_Sentinel_Design.pptx
+++ b/presentation/Supply_Chain_Sentinel_Design.pptx
@@ -4,21 +4,24 @@
   <p:sldMasterIdLst>
     <p:sldMasterId id="2147483648" r:id="rId1"/>
   </p:sldMasterIdLst>
+  <p:notesMasterIdLst>
+    <p:notesMasterId r:id="rId14"/>
+  </p:notesMasterIdLst>
   <p:sldIdLst>
-    <p:sldId id="256" r:id="rId7"/>
-    <p:sldId id="257" r:id="rId9"/>
-    <p:sldId id="258" r:id="rId10"/>
-    <p:sldId id="259" r:id="rId11"/>
-    <p:sldId id="260" r:id="rId12"/>
-    <p:sldId id="261" r:id="rId13"/>
-    <p:sldId id="262" r:id="rId14"/>
-    <p:sldId id="263" r:id="rId15"/>
-    <p:sldId id="264" r:id="rId16"/>
-    <p:sldId id="265" r:id="rId17"/>
-    <p:sldId id="266" r:id="rId18"/>
-    <p:sldId id="267" r:id="rId19"/>
+    <p:sldId id="256" r:id="rId2"/>
+    <p:sldId id="257" r:id="rId3"/>
+    <p:sldId id="258" r:id="rId4"/>
+    <p:sldId id="259" r:id="rId5"/>
+    <p:sldId id="260" r:id="rId6"/>
+    <p:sldId id="261" r:id="rId7"/>
+    <p:sldId id="262" r:id="rId8"/>
+    <p:sldId id="263" r:id="rId9"/>
+    <p:sldId id="264" r:id="rId10"/>
+    <p:sldId id="265" r:id="rId11"/>
+    <p:sldId id="266" r:id="rId12"/>
+    <p:sldId id="267" r:id="rId13"/>
   </p:sldIdLst>
-  <p:sldSz cx="12191695" cy="6858000" type="screen4x3"/>
+  <p:sldSz cx="12192000" cy="6858000"/>
   <p:notesSz cx="6858000" cy="9144000"/>
   <p:defaultTextStyle>
     <a:defPPr>
@@ -115,11 +118,27 @@
       </a:defRPr>
     </a:lvl9pPr>
   </p:defaultTextStyle>
+  <p:extLst>
+    <p:ext uri="{EFAFB233-063F-42B5-8137-9DF3F51BA10A}">
+      <p15:sldGuideLst xmlns:p15="http://schemas.microsoft.com/office/powerpoint/2012/main">
+        <p15:guide id="1" orient="horz" pos="2160">
+          <p15:clr>
+            <a:srgbClr val="A4A3A4"/>
+          </p15:clr>
+        </p15:guide>
+        <p15:guide id="2" pos="2880">
+          <p15:clr>
+            <a:srgbClr val="A4A3A4"/>
+          </p15:clr>
+        </p15:guide>
+      </p15:sldGuideLst>
+    </p:ext>
+  </p:extLst>
 </p:presentation>
 </file>
 
 <file path=ppt/notesMasters/notesMaster1.xml><?xml version="1.0" encoding="utf-8"?>
-<p:notesMaster xmlns:a="http://schemas.openxmlformats.org/drawingml/2006/main" xmlns:p="http://schemas.openxmlformats.org/presentationml/2006/main" xmlns:r="http://schemas.openxmlformats.org/officeDocument/2006/relationships">
+<p:notesMaster xmlns:a="http://schemas.openxmlformats.org/drawingml/2006/main" xmlns:r="http://schemas.openxmlformats.org/officeDocument/2006/relationships" xmlns:p="http://schemas.openxmlformats.org/presentationml/2006/main">
   <p:cSld>
     <p:bg>
       <p:bgRef idx="1001">
@@ -140,241 +159,16 @@
           <a:chExt cx="0" cy="0"/>
         </a:xfrm>
       </p:grpSpPr>
-      <p:sp>
-        <p:nvSpPr>
-          <p:cNvPr id="2" name="Header Placeholder 1"/>
-          <p:cNvSpPr>
-            <a:spLocks noGrp="1"/>
-          </p:cNvSpPr>
-          <p:nvPr>
-            <p:ph type="hdr" sz="quarter"/>
-          </p:nvPr>
-        </p:nvSpPr>
-        <p:spPr>
-          <a:xfrm>
-            <a:off x="0" y="0"/>
-            <a:ext cx="2971800" cy="457200"/>
-          </a:xfrm>
-          <a:prstGeom prst="rect">
-            <a:avLst/>
-          </a:prstGeom>
-        </p:spPr>
-        <p:txBody>
-          <a:bodyPr vert="horz" lIns="91440" tIns="45720" rIns="91440" bIns="45720" rtlCol="0"/>
-          <a:lstStyle>
-            <a:lvl1pPr algn="l">
-              <a:defRPr sz="1200"/>
-            </a:lvl1pPr>
-          </a:lstStyle>
-          <a:p>
-            <a:endParaRPr lang="en-US"/>
-          </a:p>
-        </p:txBody>
-      </p:sp>
-      <p:sp>
-        <p:nvSpPr>
-          <p:cNvPr id="3" name="Date Placeholder 2"/>
-          <p:cNvSpPr>
-            <a:spLocks noGrp="1"/>
-          </p:cNvSpPr>
-          <p:nvPr>
-            <p:ph type="dt" idx="1"/>
-          </p:nvPr>
-        </p:nvSpPr>
-        <p:spPr>
-          <a:xfrm>
-            <a:off x="3884613" y="0"/>
-            <a:ext cx="2971800" cy="457200"/>
-          </a:xfrm>
-          <a:prstGeom prst="rect">
-            <a:avLst/>
-          </a:prstGeom>
-        </p:spPr>
-        <p:txBody>
-          <a:bodyPr vert="horz" lIns="91440" tIns="45720" rIns="91440" bIns="45720" rtlCol="0"/>
-          <a:lstStyle>
-            <a:lvl1pPr algn="r">
-              <a:defRPr sz="1200"/>
-            </a:lvl1pPr>
-          </a:lstStyle>
-          <a:p>
-            <a:fld id="{0F89C1C7-3DCD-1040-A9CF-14679D8B5DDD}" type="datetimeFigureOut">
-              <a:rPr lang="en-US" smtClean="0"/>
-              <a:t>10/17/16</a:t>
-            </a:fld>
-            <a:endParaRPr lang="en-US"/>
-          </a:p>
-        </p:txBody>
-      </p:sp>
-      <p:sp>
-        <p:nvSpPr>
-          <p:cNvPr id="4" name="Slide Image Placeholder 3"/>
-          <p:cNvSpPr>
-            <a:spLocks noGrp="1" noRot="1" noChangeAspect="1"/>
-          </p:cNvSpPr>
-          <p:nvPr>
-            <p:ph type="sldImg" idx="2"/>
-          </p:nvPr>
-        </p:nvSpPr>
-        <p:spPr>
-          <a:xfrm>
-            <a:off x="1143000" y="685800"/>
-            <a:ext cx="4572000" cy="3429000"/>
-          </a:xfrm>
-          <a:prstGeom prst="rect">
-            <a:avLst/>
-          </a:prstGeom>
-          <a:noFill/>
-          <a:ln w="12700">
-            <a:solidFill>
-              <a:prstClr val="black"/>
-            </a:solidFill>
-          </a:ln>
-        </p:spPr>
-        <p:txBody>
-          <a:bodyPr vert="horz" lIns="91440" tIns="45720" rIns="91440" bIns="45720" rtlCol="0" anchor="ctr"/>
-          <a:lstStyle/>
-          <a:p>
-            <a:endParaRPr lang="en-US"/>
-          </a:p>
-        </p:txBody>
-      </p:sp>
-      <p:sp>
-        <p:nvSpPr>
-          <p:cNvPr id="5" name="Notes Placeholder 4"/>
-          <p:cNvSpPr>
-            <a:spLocks noGrp="1"/>
-          </p:cNvSpPr>
-          <p:nvPr>
-            <p:ph type="body" sz="quarter" idx="3"/>
-          </p:nvPr>
-        </p:nvSpPr>
-        <p:spPr>
-          <a:xfrm>
-            <a:off x="685800" y="4343400"/>
-            <a:ext cx="5486400" cy="4114800"/>
-          </a:xfrm>
-          <a:prstGeom prst="rect">
-            <a:avLst/>
-          </a:prstGeom>
-        </p:spPr>
-        <p:txBody>
-          <a:bodyPr vert="horz" lIns="91440" tIns="45720" rIns="91440" bIns="45720" rtlCol="0"/>
-          <a:lstStyle/>
-          <a:p>
-            <a:pPr lvl="0"/>
-            <a:r>
-              <a:rPr lang="en-US" smtClean="0"/>
-              <a:t>Click to edit Master text styles</a:t>
-            </a:r>
-          </a:p>
-          <a:p>
-            <a:pPr lvl="1"/>
-            <a:r>
-              <a:rPr lang="en-US" smtClean="0"/>
-              <a:t>Second level</a:t>
-            </a:r>
-          </a:p>
-          <a:p>
-            <a:pPr lvl="2"/>
-            <a:r>
-              <a:rPr lang="en-US" smtClean="0"/>
-              <a:t>Third level</a:t>
-            </a:r>
-          </a:p>
-          <a:p>
-            <a:pPr lvl="3"/>
-            <a:r>
-              <a:rPr lang="en-US" smtClean="0"/>
-              <a:t>Fourth level</a:t>
-            </a:r>
-          </a:p>
-          <a:p>
-            <a:pPr lvl="4"/>
-            <a:r>
-              <a:rPr lang="en-US" smtClean="0"/>
-              <a:t>Fifth level</a:t>
-            </a:r>
-            <a:endParaRPr lang="en-US"/>
-          </a:p>
-        </p:txBody>
-      </p:sp>
-      <p:sp>
-        <p:nvSpPr>
-          <p:cNvPr id="6" name="Footer Placeholder 5"/>
-          <p:cNvSpPr>
-            <a:spLocks noGrp="1"/>
-          </p:cNvSpPr>
-          <p:nvPr>
-            <p:ph type="ftr" sz="quarter" idx="4"/>
-          </p:nvPr>
-        </p:nvSpPr>
-        <p:spPr>
-          <a:xfrm>
-            <a:off x="0" y="8685213"/>
-            <a:ext cx="2971800" cy="457200"/>
-          </a:xfrm>
-          <a:prstGeom prst="rect">
-            <a:avLst/>
-          </a:prstGeom>
-        </p:spPr>
-        <p:txBody>
-          <a:bodyPr vert="horz" lIns="91440" tIns="45720" rIns="91440" bIns="45720" rtlCol="0" anchor="b"/>
-          <a:lstStyle>
-            <a:lvl1pPr algn="l">
-              <a:defRPr sz="1200"/>
-            </a:lvl1pPr>
-          </a:lstStyle>
-          <a:p>
-            <a:endParaRPr lang="en-US"/>
-          </a:p>
-        </p:txBody>
-      </p:sp>
-      <p:sp>
-        <p:nvSpPr>
-          <p:cNvPr id="7" name="Slide Number Placeholder 6"/>
-          <p:cNvSpPr>
-            <a:spLocks noGrp="1"/>
-          </p:cNvSpPr>
-          <p:nvPr>
-            <p:ph type="sldNum" sz="quarter" idx="5"/>
-          </p:nvPr>
-        </p:nvSpPr>
-        <p:spPr>
-          <a:xfrm>
-            <a:off x="3884613" y="8685213"/>
-            <a:ext cx="2971800" cy="457200"/>
-          </a:xfrm>
-          <a:prstGeom prst="rect">
-            <a:avLst/>
-          </a:prstGeom>
-        </p:spPr>
-        <p:txBody>
-          <a:bodyPr vert="horz" lIns="91440" tIns="45720" rIns="91440" bIns="45720" rtlCol="0" anchor="b"/>
-          <a:lstStyle>
-            <a:lvl1pPr algn="r">
-              <a:defRPr sz="1200"/>
-            </a:lvl1pPr>
-          </a:lstStyle>
-          <a:p>
-            <a:fld id="{BB5E49A5-4136-284D-997B-48E1D791AD67}" type="slidenum">
-              <a:rPr lang="en-US" smtClean="0"/>
-              <a:t>‹#›</a:t>
-            </a:fld>
-            <a:endParaRPr lang="en-US"/>
-          </a:p>
-        </p:txBody>
-      </p:sp>
     </p:spTree>
     <p:extLst>
       <p:ext uri="{BB962C8B-B14F-4D97-AF65-F5344CB8AC3E}">
-        <p14:creationId xmlns:p14="http://schemas.microsoft.com/office/powerpoint/2010/main" val="2623252185"/>
+        <p14:creationId xmlns:p14="http://schemas.microsoft.com/office/powerpoint/2010/main" val="2891329152"/>
       </p:ext>
     </p:extLst>
   </p:cSld>
   <p:clrMap bg1="lt1" tx1="dk1" bg2="lt2" tx2="dk2" accent1="accent1" accent2="accent2" accent3="accent3" accent4="accent4" accent5="accent5" accent6="accent6" hlink="hlink" folHlink="folHlink"/>
   <p:notesStyle>
-    <a:lvl1pPr marL="0" algn="l" defTabSz="457200" rtl="0" eaLnBrk="1" latinLnBrk="0" hangingPunct="1">
+    <a:lvl1pPr marL="0" algn="l" defTabSz="914400" rtl="0" eaLnBrk="1" latinLnBrk="0" hangingPunct="1">
       <a:defRPr sz="1200" kern="1200">
         <a:solidFill>
           <a:schemeClr val="tx1"/>
@@ -384,7 +178,7 @@
         <a:cs typeface="+mn-cs"/>
       </a:defRPr>
     </a:lvl1pPr>
-    <a:lvl2pPr marL="457200" algn="l" defTabSz="457200" rtl="0" eaLnBrk="1" latinLnBrk="0" hangingPunct="1">
+    <a:lvl2pPr marL="457200" algn="l" defTabSz="914400" rtl="0" eaLnBrk="1" latinLnBrk="0" hangingPunct="1">
       <a:defRPr sz="1200" kern="1200">
         <a:solidFill>
           <a:schemeClr val="tx1"/>
@@ -394,7 +188,7 @@
         <a:cs typeface="+mn-cs"/>
       </a:defRPr>
     </a:lvl2pPr>
-    <a:lvl3pPr marL="914400" algn="l" defTabSz="457200" rtl="0" eaLnBrk="1" latinLnBrk="0" hangingPunct="1">
+    <a:lvl3pPr marL="914400" algn="l" defTabSz="914400" rtl="0" eaLnBrk="1" latinLnBrk="0" hangingPunct="1">
       <a:defRPr sz="1200" kern="1200">
         <a:solidFill>
           <a:schemeClr val="tx1"/>
@@ -404,7 +198,7 @@
         <a:cs typeface="+mn-cs"/>
       </a:defRPr>
     </a:lvl3pPr>
-    <a:lvl4pPr marL="1371600" algn="l" defTabSz="457200" rtl="0" eaLnBrk="1" latinLnBrk="0" hangingPunct="1">
+    <a:lvl4pPr marL="1371600" algn="l" defTabSz="914400" rtl="0" eaLnBrk="1" latinLnBrk="0" hangingPunct="1">
       <a:defRPr sz="1200" kern="1200">
         <a:solidFill>
           <a:schemeClr val="tx1"/>
@@ -414,7 +208,7 @@
         <a:cs typeface="+mn-cs"/>
       </a:defRPr>
     </a:lvl4pPr>
-    <a:lvl5pPr marL="1828800" algn="l" defTabSz="457200" rtl="0" eaLnBrk="1" latinLnBrk="0" hangingPunct="1">
+    <a:lvl5pPr marL="1828800" algn="l" defTabSz="914400" rtl="0" eaLnBrk="1" latinLnBrk="0" hangingPunct="1">
       <a:defRPr sz="1200" kern="1200">
         <a:solidFill>
           <a:schemeClr val="tx1"/>
@@ -424,7 +218,7 @@
         <a:cs typeface="+mn-cs"/>
       </a:defRPr>
     </a:lvl5pPr>
-    <a:lvl6pPr marL="2286000" algn="l" defTabSz="457200" rtl="0" eaLnBrk="1" latinLnBrk="0" hangingPunct="1">
+    <a:lvl6pPr marL="2286000" algn="l" defTabSz="914400" rtl="0" eaLnBrk="1" latinLnBrk="0" hangingPunct="1">
       <a:defRPr sz="1200" kern="1200">
         <a:solidFill>
           <a:schemeClr val="tx1"/>
@@ -434,7 +228,7 @@
         <a:cs typeface="+mn-cs"/>
       </a:defRPr>
     </a:lvl6pPr>
-    <a:lvl7pPr marL="2743200" algn="l" defTabSz="457200" rtl="0" eaLnBrk="1" latinLnBrk="0" hangingPunct="1">
+    <a:lvl7pPr marL="2743200" algn="l" defTabSz="914400" rtl="0" eaLnBrk="1" latinLnBrk="0" hangingPunct="1">
       <a:defRPr sz="1200" kern="1200">
         <a:solidFill>
           <a:schemeClr val="tx1"/>
@@ -444,7 +238,7 @@
         <a:cs typeface="+mn-cs"/>
       </a:defRPr>
     </a:lvl7pPr>
-    <a:lvl8pPr marL="3200400" algn="l" defTabSz="457200" rtl="0" eaLnBrk="1" latinLnBrk="0" hangingPunct="1">
+    <a:lvl8pPr marL="3200400" algn="l" defTabSz="914400" rtl="0" eaLnBrk="1" latinLnBrk="0" hangingPunct="1">
       <a:defRPr sz="1200" kern="1200">
         <a:solidFill>
           <a:schemeClr val="tx1"/>
@@ -454,7 +248,7 @@
         <a:cs typeface="+mn-cs"/>
       </a:defRPr>
     </a:lvl8pPr>
-    <a:lvl9pPr marL="3657600" algn="l" defTabSz="457200" rtl="0" eaLnBrk="1" latinLnBrk="0" hangingPunct="1">
+    <a:lvl9pPr marL="3657600" algn="l" defTabSz="914400" rtl="0" eaLnBrk="1" latinLnBrk="0" hangingPunct="1">
       <a:defRPr sz="1200" kern="1200">
         <a:solidFill>
           <a:schemeClr val="tx1"/>
@@ -469,7 +263,7 @@
 </file>
 
 <file path=ppt/notesSlides/notesSlide1.xml><?xml version="1.0" encoding="utf-8"?>
-<p:notes xmlns:a="http://schemas.openxmlformats.org/drawingml/2006/main" xmlns:p="http://schemas.openxmlformats.org/presentationml/2006/main" xmlns:r="http://schemas.openxmlformats.org/officeDocument/2006/relationships">
+<p:notes xmlns:a="http://schemas.openxmlformats.org/drawingml/2006/main" xmlns:r="http://schemas.openxmlformats.org/officeDocument/2006/relationships" xmlns:p="http://schemas.openxmlformats.org/presentationml/2006/main">
   <p:cSld>
     <p:spTree>
       <p:nvGrpSpPr>
@@ -489,7 +283,7 @@
         <p:nvSpPr>
           <p:cNvPr id="2" name="Slide Image Placeholder 1"/>
           <p:cNvSpPr>
-            <a:spLocks noGrp="1"/>
+            <a:spLocks noGrp="1" noRot="1" noChangeAspect="1"/>
           </p:cNvSpPr>
           <p:nvPr>
             <p:ph type="sldImg" idx="2"/>
@@ -504,7 +298,7 @@
             <a:spLocks noGrp="1"/>
           </p:cNvSpPr>
           <p:nvPr>
-            <p:ph type="body" idx="3" sz="quarter"/>
+            <p:ph type="body" sz="quarter" idx="3"/>
           </p:nvPr>
         </p:nvSpPr>
         <p:spPr/>
@@ -525,7 +319,7 @@
             <a:spLocks noGrp="1"/>
           </p:cNvSpPr>
           <p:nvPr>
-            <p:ph type="sldNum" idx="5" sz="quarter"/>
+            <p:ph type="sldNum" sz="quarter" idx="5"/>
           </p:nvPr>
         </p:nvSpPr>
         <p:spPr/>
@@ -539,7 +333,7 @@
 </file>
 
 <file path=ppt/notesSlides/notesSlide10.xml><?xml version="1.0" encoding="utf-8"?>
-<p:notes xmlns:a="http://schemas.openxmlformats.org/drawingml/2006/main" xmlns:p="http://schemas.openxmlformats.org/presentationml/2006/main" xmlns:r="http://schemas.openxmlformats.org/officeDocument/2006/relationships">
+<p:notes xmlns:a="http://schemas.openxmlformats.org/drawingml/2006/main" xmlns:r="http://schemas.openxmlformats.org/officeDocument/2006/relationships" xmlns:p="http://schemas.openxmlformats.org/presentationml/2006/main">
   <p:cSld>
     <p:spTree>
       <p:nvGrpSpPr>
@@ -559,7 +353,7 @@
         <p:nvSpPr>
           <p:cNvPr id="2" name="Slide Image Placeholder 1"/>
           <p:cNvSpPr>
-            <a:spLocks noGrp="1"/>
+            <a:spLocks noGrp="1" noRot="1" noChangeAspect="1"/>
           </p:cNvSpPr>
           <p:nvPr>
             <p:ph type="sldImg" idx="2"/>
@@ -574,7 +368,7 @@
             <a:spLocks noGrp="1"/>
           </p:cNvSpPr>
           <p:nvPr>
-            <p:ph type="body" idx="3" sz="quarter"/>
+            <p:ph type="body" sz="quarter" idx="3"/>
           </p:nvPr>
         </p:nvSpPr>
         <p:spPr/>
@@ -595,7 +389,7 @@
             <a:spLocks noGrp="1"/>
           </p:cNvSpPr>
           <p:nvPr>
-            <p:ph type="sldNum" idx="5" sz="quarter"/>
+            <p:ph type="sldNum" sz="quarter" idx="5"/>
           </p:nvPr>
         </p:nvSpPr>
         <p:spPr/>
@@ -609,7 +403,7 @@
 </file>
 
 <file path=ppt/notesSlides/notesSlide11.xml><?xml version="1.0" encoding="utf-8"?>
-<p:notes xmlns:a="http://schemas.openxmlformats.org/drawingml/2006/main" xmlns:p="http://schemas.openxmlformats.org/presentationml/2006/main" xmlns:r="http://schemas.openxmlformats.org/officeDocument/2006/relationships">
+<p:notes xmlns:a="http://schemas.openxmlformats.org/drawingml/2006/main" xmlns:r="http://schemas.openxmlformats.org/officeDocument/2006/relationships" xmlns:p="http://schemas.openxmlformats.org/presentationml/2006/main">
   <p:cSld>
     <p:spTree>
       <p:nvGrpSpPr>
@@ -629,7 +423,7 @@
         <p:nvSpPr>
           <p:cNvPr id="2" name="Slide Image Placeholder 1"/>
           <p:cNvSpPr>
-            <a:spLocks noGrp="1"/>
+            <a:spLocks noGrp="1" noRot="1" noChangeAspect="1"/>
           </p:cNvSpPr>
           <p:nvPr>
             <p:ph type="sldImg" idx="2"/>
@@ -644,7 +438,7 @@
             <a:spLocks noGrp="1"/>
           </p:cNvSpPr>
           <p:nvPr>
-            <p:ph type="body" idx="3" sz="quarter"/>
+            <p:ph type="body" sz="quarter" idx="3"/>
           </p:nvPr>
         </p:nvSpPr>
         <p:spPr/>
@@ -665,7 +459,7 @@
             <a:spLocks noGrp="1"/>
           </p:cNvSpPr>
           <p:nvPr>
-            <p:ph type="sldNum" idx="5" sz="quarter"/>
+            <p:ph type="sldNum" sz="quarter" idx="5"/>
           </p:nvPr>
         </p:nvSpPr>
         <p:spPr/>
@@ -679,7 +473,7 @@
 </file>
 
 <file path=ppt/notesSlides/notesSlide12.xml><?xml version="1.0" encoding="utf-8"?>
-<p:notes xmlns:a="http://schemas.openxmlformats.org/drawingml/2006/main" xmlns:p="http://schemas.openxmlformats.org/presentationml/2006/main" xmlns:r="http://schemas.openxmlformats.org/officeDocument/2006/relationships">
+<p:notes xmlns:a="http://schemas.openxmlformats.org/drawingml/2006/main" xmlns:r="http://schemas.openxmlformats.org/officeDocument/2006/relationships" xmlns:p="http://schemas.openxmlformats.org/presentationml/2006/main">
   <p:cSld>
     <p:spTree>
       <p:nvGrpSpPr>
@@ -699,7 +493,7 @@
         <p:nvSpPr>
           <p:cNvPr id="2" name="Slide Image Placeholder 1"/>
           <p:cNvSpPr>
-            <a:spLocks noGrp="1"/>
+            <a:spLocks noGrp="1" noRot="1" noChangeAspect="1"/>
           </p:cNvSpPr>
           <p:nvPr>
             <p:ph type="sldImg" idx="2"/>
@@ -714,7 +508,7 @@
             <a:spLocks noGrp="1"/>
           </p:cNvSpPr>
           <p:nvPr>
-            <p:ph type="body" idx="3" sz="quarter"/>
+            <p:ph type="body" sz="quarter" idx="3"/>
           </p:nvPr>
         </p:nvSpPr>
         <p:spPr/>
@@ -735,7 +529,7 @@
             <a:spLocks noGrp="1"/>
           </p:cNvSpPr>
           <p:nvPr>
-            <p:ph type="sldNum" idx="5" sz="quarter"/>
+            <p:ph type="sldNum" sz="quarter" idx="5"/>
           </p:nvPr>
         </p:nvSpPr>
         <p:spPr/>
@@ -749,7 +543,7 @@
 </file>
 
 <file path=ppt/notesSlides/notesSlide2.xml><?xml version="1.0" encoding="utf-8"?>
-<p:notes xmlns:a="http://schemas.openxmlformats.org/drawingml/2006/main" xmlns:p="http://schemas.openxmlformats.org/presentationml/2006/main" xmlns:r="http://schemas.openxmlformats.org/officeDocument/2006/relationships">
+<p:notes xmlns:a="http://schemas.openxmlformats.org/drawingml/2006/main" xmlns:r="http://schemas.openxmlformats.org/officeDocument/2006/relationships" xmlns:p="http://schemas.openxmlformats.org/presentationml/2006/main">
   <p:cSld>
     <p:spTree>
       <p:nvGrpSpPr>
@@ -769,7 +563,7 @@
         <p:nvSpPr>
           <p:cNvPr id="2" name="Slide Image Placeholder 1"/>
           <p:cNvSpPr>
-            <a:spLocks noGrp="1"/>
+            <a:spLocks noGrp="1" noRot="1" noChangeAspect="1"/>
           </p:cNvSpPr>
           <p:nvPr>
             <p:ph type="sldImg" idx="2"/>
@@ -784,7 +578,7 @@
             <a:spLocks noGrp="1"/>
           </p:cNvSpPr>
           <p:nvPr>
-            <p:ph type="body" idx="3" sz="quarter"/>
+            <p:ph type="body" sz="quarter" idx="3"/>
           </p:nvPr>
         </p:nvSpPr>
         <p:spPr/>
@@ -805,7 +599,7 @@
             <a:spLocks noGrp="1"/>
           </p:cNvSpPr>
           <p:nvPr>
-            <p:ph type="sldNum" idx="5" sz="quarter"/>
+            <p:ph type="sldNum" sz="quarter" idx="5"/>
           </p:nvPr>
         </p:nvSpPr>
         <p:spPr/>
@@ -819,7 +613,7 @@
 </file>
 
 <file path=ppt/notesSlides/notesSlide3.xml><?xml version="1.0" encoding="utf-8"?>
-<p:notes xmlns:a="http://schemas.openxmlformats.org/drawingml/2006/main" xmlns:p="http://schemas.openxmlformats.org/presentationml/2006/main" xmlns:r="http://schemas.openxmlformats.org/officeDocument/2006/relationships">
+<p:notes xmlns:a="http://schemas.openxmlformats.org/drawingml/2006/main" xmlns:r="http://schemas.openxmlformats.org/officeDocument/2006/relationships" xmlns:p="http://schemas.openxmlformats.org/presentationml/2006/main">
   <p:cSld>
     <p:spTree>
       <p:nvGrpSpPr>
@@ -839,7 +633,7 @@
         <p:nvSpPr>
           <p:cNvPr id="2" name="Slide Image Placeholder 1"/>
           <p:cNvSpPr>
-            <a:spLocks noGrp="1"/>
+            <a:spLocks noGrp="1" noRot="1" noChangeAspect="1"/>
           </p:cNvSpPr>
           <p:nvPr>
             <p:ph type="sldImg" idx="2"/>
@@ -854,7 +648,7 @@
             <a:spLocks noGrp="1"/>
           </p:cNvSpPr>
           <p:nvPr>
-            <p:ph type="body" idx="3" sz="quarter"/>
+            <p:ph type="body" sz="quarter" idx="3"/>
           </p:nvPr>
         </p:nvSpPr>
         <p:spPr/>
@@ -875,7 +669,7 @@
             <a:spLocks noGrp="1"/>
           </p:cNvSpPr>
           <p:nvPr>
-            <p:ph type="sldNum" idx="5" sz="quarter"/>
+            <p:ph type="sldNum" sz="quarter" idx="5"/>
           </p:nvPr>
         </p:nvSpPr>
         <p:spPr/>
@@ -889,7 +683,7 @@
 </file>
 
 <file path=ppt/notesSlides/notesSlide4.xml><?xml version="1.0" encoding="utf-8"?>
-<p:notes xmlns:a="http://schemas.openxmlformats.org/drawingml/2006/main" xmlns:p="http://schemas.openxmlformats.org/presentationml/2006/main" xmlns:r="http://schemas.openxmlformats.org/officeDocument/2006/relationships">
+<p:notes xmlns:a="http://schemas.openxmlformats.org/drawingml/2006/main" xmlns:r="http://schemas.openxmlformats.org/officeDocument/2006/relationships" xmlns:p="http://schemas.openxmlformats.org/presentationml/2006/main">
   <p:cSld>
     <p:spTree>
       <p:nvGrpSpPr>
@@ -909,7 +703,7 @@
         <p:nvSpPr>
           <p:cNvPr id="2" name="Slide Image Placeholder 1"/>
           <p:cNvSpPr>
-            <a:spLocks noGrp="1"/>
+            <a:spLocks noGrp="1" noRot="1" noChangeAspect="1"/>
           </p:cNvSpPr>
           <p:nvPr>
             <p:ph type="sldImg" idx="2"/>
@@ -924,7 +718,7 @@
             <a:spLocks noGrp="1"/>
           </p:cNvSpPr>
           <p:nvPr>
-            <p:ph type="body" idx="3" sz="quarter"/>
+            <p:ph type="body" sz="quarter" idx="3"/>
           </p:nvPr>
         </p:nvSpPr>
         <p:spPr/>
@@ -945,7 +739,7 @@
             <a:spLocks noGrp="1"/>
           </p:cNvSpPr>
           <p:nvPr>
-            <p:ph type="sldNum" idx="5" sz="quarter"/>
+            <p:ph type="sldNum" sz="quarter" idx="5"/>
           </p:nvPr>
         </p:nvSpPr>
         <p:spPr/>
@@ -959,7 +753,7 @@
 </file>
 
 <file path=ppt/notesSlides/notesSlide5.xml><?xml version="1.0" encoding="utf-8"?>
-<p:notes xmlns:a="http://schemas.openxmlformats.org/drawingml/2006/main" xmlns:p="http://schemas.openxmlformats.org/presentationml/2006/main" xmlns:r="http://schemas.openxmlformats.org/officeDocument/2006/relationships">
+<p:notes xmlns:a="http://schemas.openxmlformats.org/drawingml/2006/main" xmlns:r="http://schemas.openxmlformats.org/officeDocument/2006/relationships" xmlns:p="http://schemas.openxmlformats.org/presentationml/2006/main">
   <p:cSld>
     <p:spTree>
       <p:nvGrpSpPr>
@@ -979,7 +773,7 @@
         <p:nvSpPr>
           <p:cNvPr id="2" name="Slide Image Placeholder 1"/>
           <p:cNvSpPr>
-            <a:spLocks noGrp="1"/>
+            <a:spLocks noGrp="1" noRot="1" noChangeAspect="1"/>
           </p:cNvSpPr>
           <p:nvPr>
             <p:ph type="sldImg" idx="2"/>
@@ -994,7 +788,7 @@
             <a:spLocks noGrp="1"/>
           </p:cNvSpPr>
           <p:nvPr>
-            <p:ph type="body" idx="3" sz="quarter"/>
+            <p:ph type="body" sz="quarter" idx="3"/>
           </p:nvPr>
         </p:nvSpPr>
         <p:spPr/>
@@ -1015,7 +809,7 @@
             <a:spLocks noGrp="1"/>
           </p:cNvSpPr>
           <p:nvPr>
-            <p:ph type="sldNum" idx="5" sz="quarter"/>
+            <p:ph type="sldNum" sz="quarter" idx="5"/>
           </p:nvPr>
         </p:nvSpPr>
         <p:spPr/>
@@ -1029,7 +823,7 @@
 </file>
 
 <file path=ppt/notesSlides/notesSlide6.xml><?xml version="1.0" encoding="utf-8"?>
-<p:notes xmlns:a="http://schemas.openxmlformats.org/drawingml/2006/main" xmlns:p="http://schemas.openxmlformats.org/presentationml/2006/main" xmlns:r="http://schemas.openxmlformats.org/officeDocument/2006/relationships">
+<p:notes xmlns:a="http://schemas.openxmlformats.org/drawingml/2006/main" xmlns:r="http://schemas.openxmlformats.org/officeDocument/2006/relationships" xmlns:p="http://schemas.openxmlformats.org/presentationml/2006/main">
   <p:cSld>
     <p:spTree>
       <p:nvGrpSpPr>
@@ -1049,7 +843,7 @@
         <p:nvSpPr>
           <p:cNvPr id="2" name="Slide Image Placeholder 1"/>
           <p:cNvSpPr>
-            <a:spLocks noGrp="1"/>
+            <a:spLocks noGrp="1" noRot="1" noChangeAspect="1"/>
           </p:cNvSpPr>
           <p:nvPr>
             <p:ph type="sldImg" idx="2"/>
@@ -1064,7 +858,7 @@
             <a:spLocks noGrp="1"/>
           </p:cNvSpPr>
           <p:nvPr>
-            <p:ph type="body" idx="3" sz="quarter"/>
+            <p:ph type="body" sz="quarter" idx="3"/>
           </p:nvPr>
         </p:nvSpPr>
         <p:spPr/>
@@ -1085,7 +879,7 @@
             <a:spLocks noGrp="1"/>
           </p:cNvSpPr>
           <p:nvPr>
-            <p:ph type="sldNum" idx="5" sz="quarter"/>
+            <p:ph type="sldNum" sz="quarter" idx="5"/>
           </p:nvPr>
         </p:nvSpPr>
         <p:spPr/>
@@ -1099,7 +893,7 @@
 </file>
 
 <file path=ppt/notesSlides/notesSlide7.xml><?xml version="1.0" encoding="utf-8"?>
-<p:notes xmlns:a="http://schemas.openxmlformats.org/drawingml/2006/main" xmlns:p="http://schemas.openxmlformats.org/presentationml/2006/main" xmlns:r="http://schemas.openxmlformats.org/officeDocument/2006/relationships">
+<p:notes xmlns:a="http://schemas.openxmlformats.org/drawingml/2006/main" xmlns:r="http://schemas.openxmlformats.org/officeDocument/2006/relationships" xmlns:p="http://schemas.openxmlformats.org/presentationml/2006/main">
   <p:cSld>
     <p:spTree>
       <p:nvGrpSpPr>
@@ -1119,7 +913,7 @@
         <p:nvSpPr>
           <p:cNvPr id="2" name="Slide Image Placeholder 1"/>
           <p:cNvSpPr>
-            <a:spLocks noGrp="1"/>
+            <a:spLocks noGrp="1" noRot="1" noChangeAspect="1"/>
           </p:cNvSpPr>
           <p:nvPr>
             <p:ph type="sldImg" idx="2"/>
@@ -1134,7 +928,7 @@
             <a:spLocks noGrp="1"/>
           </p:cNvSpPr>
           <p:nvPr>
-            <p:ph type="body" idx="3" sz="quarter"/>
+            <p:ph type="body" sz="quarter" idx="3"/>
           </p:nvPr>
         </p:nvSpPr>
         <p:spPr/>
@@ -1155,7 +949,7 @@
             <a:spLocks noGrp="1"/>
           </p:cNvSpPr>
           <p:nvPr>
-            <p:ph type="sldNum" idx="5" sz="quarter"/>
+            <p:ph type="sldNum" sz="quarter" idx="5"/>
           </p:nvPr>
         </p:nvSpPr>
         <p:spPr/>
@@ -1169,7 +963,7 @@
 </file>
 
 <file path=ppt/notesSlides/notesSlide8.xml><?xml version="1.0" encoding="utf-8"?>
-<p:notes xmlns:a="http://schemas.openxmlformats.org/drawingml/2006/main" xmlns:p="http://schemas.openxmlformats.org/presentationml/2006/main" xmlns:r="http://schemas.openxmlformats.org/officeDocument/2006/relationships">
+<p:notes xmlns:a="http://schemas.openxmlformats.org/drawingml/2006/main" xmlns:r="http://schemas.openxmlformats.org/officeDocument/2006/relationships" xmlns:p="http://schemas.openxmlformats.org/presentationml/2006/main">
   <p:cSld>
     <p:spTree>
       <p:nvGrpSpPr>
@@ -1189,7 +983,7 @@
         <p:nvSpPr>
           <p:cNvPr id="2" name="Slide Image Placeholder 1"/>
           <p:cNvSpPr>
-            <a:spLocks noGrp="1"/>
+            <a:spLocks noGrp="1" noRot="1" noChangeAspect="1"/>
           </p:cNvSpPr>
           <p:nvPr>
             <p:ph type="sldImg" idx="2"/>
@@ -1204,7 +998,7 @@
             <a:spLocks noGrp="1"/>
           </p:cNvSpPr>
           <p:nvPr>
-            <p:ph type="body" idx="3" sz="quarter"/>
+            <p:ph type="body" sz="quarter" idx="3"/>
           </p:nvPr>
         </p:nvSpPr>
         <p:spPr/>
@@ -1225,7 +1019,7 @@
             <a:spLocks noGrp="1"/>
           </p:cNvSpPr>
           <p:nvPr>
-            <p:ph type="sldNum" idx="5" sz="quarter"/>
+            <p:ph type="sldNum" sz="quarter" idx="5"/>
           </p:nvPr>
         </p:nvSpPr>
         <p:spPr/>
@@ -1239,7 +1033,7 @@
 </file>
 
 <file path=ppt/notesSlides/notesSlide9.xml><?xml version="1.0" encoding="utf-8"?>
-<p:notes xmlns:a="http://schemas.openxmlformats.org/drawingml/2006/main" xmlns:p="http://schemas.openxmlformats.org/presentationml/2006/main" xmlns:r="http://schemas.openxmlformats.org/officeDocument/2006/relationships">
+<p:notes xmlns:a="http://schemas.openxmlformats.org/drawingml/2006/main" xmlns:r="http://schemas.openxmlformats.org/officeDocument/2006/relationships" xmlns:p="http://schemas.openxmlformats.org/presentationml/2006/main">
   <p:cSld>
     <p:spTree>
       <p:nvGrpSpPr>
@@ -1259,7 +1053,7 @@
         <p:nvSpPr>
           <p:cNvPr id="2" name="Slide Image Placeholder 1"/>
           <p:cNvSpPr>
-            <a:spLocks noGrp="1"/>
+            <a:spLocks noGrp="1" noRot="1" noChangeAspect="1"/>
           </p:cNvSpPr>
           <p:nvPr>
             <p:ph type="sldImg" idx="2"/>
@@ -1274,7 +1068,7 @@
             <a:spLocks noGrp="1"/>
           </p:cNvSpPr>
           <p:nvPr>
-            <p:ph type="body" idx="3" sz="quarter"/>
+            <p:ph type="body" sz="quarter" idx="3"/>
           </p:nvPr>
         </p:nvSpPr>
         <p:spPr/>
@@ -1295,7 +1089,7 @@
             <a:spLocks noGrp="1"/>
           </p:cNvSpPr>
           <p:nvPr>
-            <p:ph type="sldNum" idx="5" sz="quarter"/>
+            <p:ph type="sldNum" sz="quarter" idx="5"/>
           </p:nvPr>
         </p:nvSpPr>
         <p:spPr/>
@@ -1346,10 +1140,9 @@
           <a:lstStyle/>
           <a:p>
             <a:r>
-              <a:rPr lang="en-US" smtClean="0"/>
+              <a:rPr lang="en-US"/>
               <a:t>Click to edit Master title style</a:t>
             </a:r>
-            <a:endParaRPr lang="en-US"/>
           </a:p>
         </p:txBody>
       </p:sp>
@@ -1465,10 +1258,9 @@
           </a:lstStyle>
           <a:p>
             <a:r>
-              <a:rPr lang="en-US" smtClean="0"/>
+              <a:rPr lang="en-US"/>
               <a:t>Click to edit Master subtitle style</a:t>
             </a:r>
-            <a:endParaRPr lang="en-US"/>
           </a:p>
         </p:txBody>
       </p:sp>
@@ -1489,7 +1281,7 @@
           <a:p>
             <a:fld id="{5BCAD085-E8A6-8845-BD4E-CB4CCA059FC4}" type="datetimeFigureOut">
               <a:rPr lang="en-US" smtClean="0"/>
-              <a:t>1/27/13</a:t>
+              <a:t>6/24/26</a:t>
             </a:fld>
             <a:endParaRPr lang="en-US"/>
           </a:p>
@@ -1583,10 +1375,9 @@
           <a:lstStyle/>
           <a:p>
             <a:r>
-              <a:rPr lang="en-US" smtClean="0"/>
+              <a:rPr lang="en-US"/>
               <a:t>Click to edit Master title style</a:t>
             </a:r>
-            <a:endParaRPr lang="en-US"/>
           </a:p>
         </p:txBody>
       </p:sp>
@@ -1607,38 +1398,37 @@
           <a:p>
             <a:pPr lvl="0"/>
             <a:r>
-              <a:rPr lang="en-US" smtClean="0"/>
+              <a:rPr lang="en-US"/>
               <a:t>Click to edit Master text styles</a:t>
             </a:r>
           </a:p>
           <a:p>
             <a:pPr lvl="1"/>
             <a:r>
-              <a:rPr lang="en-US" smtClean="0"/>
+              <a:rPr lang="en-US"/>
               <a:t>Second level</a:t>
             </a:r>
           </a:p>
           <a:p>
             <a:pPr lvl="2"/>
             <a:r>
-              <a:rPr lang="en-US" smtClean="0"/>
+              <a:rPr lang="en-US"/>
               <a:t>Third level</a:t>
             </a:r>
           </a:p>
           <a:p>
             <a:pPr lvl="3"/>
             <a:r>
-              <a:rPr lang="en-US" smtClean="0"/>
+              <a:rPr lang="en-US"/>
               <a:t>Fourth level</a:t>
             </a:r>
           </a:p>
           <a:p>
             <a:pPr lvl="4"/>
             <a:r>
-              <a:rPr lang="en-US" smtClean="0"/>
+              <a:rPr lang="en-US"/>
               <a:t>Fifth level</a:t>
             </a:r>
-            <a:endParaRPr lang="en-US"/>
           </a:p>
         </p:txBody>
       </p:sp>
@@ -1659,7 +1449,7 @@
           <a:p>
             <a:fld id="{5BCAD085-E8A6-8845-BD4E-CB4CCA059FC4}" type="datetimeFigureOut">
               <a:rPr lang="en-US" smtClean="0"/>
-              <a:t>1/27/13</a:t>
+              <a:t>6/24/26</a:t>
             </a:fld>
             <a:endParaRPr lang="en-US"/>
           </a:p>
@@ -1758,10 +1548,9 @@
           <a:lstStyle/>
           <a:p>
             <a:r>
-              <a:rPr lang="en-US" smtClean="0"/>
+              <a:rPr lang="en-US"/>
               <a:t>Click to edit Master title style</a:t>
             </a:r>
-            <a:endParaRPr lang="en-US"/>
           </a:p>
         </p:txBody>
       </p:sp>
@@ -1787,38 +1576,37 @@
           <a:p>
             <a:pPr lvl="0"/>
             <a:r>
-              <a:rPr lang="en-US" smtClean="0"/>
+              <a:rPr lang="en-US"/>
               <a:t>Click to edit Master text styles</a:t>
             </a:r>
           </a:p>
           <a:p>
             <a:pPr lvl="1"/>
             <a:r>
-              <a:rPr lang="en-US" smtClean="0"/>
+              <a:rPr lang="en-US"/>
               <a:t>Second level</a:t>
             </a:r>
           </a:p>
           <a:p>
             <a:pPr lvl="2"/>
             <a:r>
-              <a:rPr lang="en-US" smtClean="0"/>
+              <a:rPr lang="en-US"/>
               <a:t>Third level</a:t>
             </a:r>
           </a:p>
           <a:p>
             <a:pPr lvl="3"/>
             <a:r>
-              <a:rPr lang="en-US" smtClean="0"/>
+              <a:rPr lang="en-US"/>
               <a:t>Fourth level</a:t>
             </a:r>
           </a:p>
           <a:p>
             <a:pPr lvl="4"/>
             <a:r>
-              <a:rPr lang="en-US" smtClean="0"/>
+              <a:rPr lang="en-US"/>
               <a:t>Fifth level</a:t>
             </a:r>
-            <a:endParaRPr lang="en-US"/>
           </a:p>
         </p:txBody>
       </p:sp>
@@ -1839,7 +1627,7 @@
           <a:p>
             <a:fld id="{5BCAD085-E8A6-8845-BD4E-CB4CCA059FC4}" type="datetimeFigureOut">
               <a:rPr lang="en-US" smtClean="0"/>
-              <a:t>1/27/13</a:t>
+              <a:t>6/24/26</a:t>
             </a:fld>
             <a:endParaRPr lang="en-US"/>
           </a:p>
@@ -1933,10 +1721,9 @@
           <a:lstStyle/>
           <a:p>
             <a:r>
-              <a:rPr lang="en-US" smtClean="0"/>
+              <a:rPr lang="en-US"/>
               <a:t>Click to edit Master title style</a:t>
             </a:r>
-            <a:endParaRPr lang="en-US"/>
           </a:p>
         </p:txBody>
       </p:sp>
@@ -1957,38 +1744,37 @@
           <a:p>
             <a:pPr lvl="0"/>
             <a:r>
-              <a:rPr lang="en-US" smtClean="0"/>
+              <a:rPr lang="en-US"/>
               <a:t>Click to edit Master text styles</a:t>
             </a:r>
           </a:p>
           <a:p>
             <a:pPr lvl="1"/>
             <a:r>
-              <a:rPr lang="en-US" smtClean="0"/>
+              <a:rPr lang="en-US"/>
               <a:t>Second level</a:t>
             </a:r>
           </a:p>
           <a:p>
             <a:pPr lvl="2"/>
             <a:r>
-              <a:rPr lang="en-US" smtClean="0"/>
+              <a:rPr lang="en-US"/>
               <a:t>Third level</a:t>
             </a:r>
           </a:p>
           <a:p>
             <a:pPr lvl="3"/>
             <a:r>
-              <a:rPr lang="en-US" smtClean="0"/>
+              <a:rPr lang="en-US"/>
               <a:t>Fourth level</a:t>
             </a:r>
           </a:p>
           <a:p>
             <a:pPr lvl="4"/>
             <a:r>
-              <a:rPr lang="en-US" smtClean="0"/>
+              <a:rPr lang="en-US"/>
               <a:t>Fifth level</a:t>
             </a:r>
-            <a:endParaRPr lang="en-US"/>
           </a:p>
         </p:txBody>
       </p:sp>
@@ -2009,7 +1795,7 @@
           <a:p>
             <a:fld id="{5BCAD085-E8A6-8845-BD4E-CB4CCA059FC4}" type="datetimeFigureOut">
               <a:rPr lang="en-US" smtClean="0"/>
-              <a:t>1/27/13</a:t>
+              <a:t>6/24/26</a:t>
             </a:fld>
             <a:endParaRPr lang="en-US"/>
           </a:p>
@@ -2112,10 +1898,9 @@
           </a:lstStyle>
           <a:p>
             <a:r>
-              <a:rPr lang="en-US" smtClean="0"/>
+              <a:rPr lang="en-US"/>
               <a:t>Click to edit Master title style</a:t>
             </a:r>
-            <a:endParaRPr lang="en-US"/>
           </a:p>
         </p:txBody>
       </p:sp>
@@ -2232,7 +2017,7 @@
           <a:p>
             <a:pPr lvl="0"/>
             <a:r>
-              <a:rPr lang="en-US" smtClean="0"/>
+              <a:rPr lang="en-US"/>
               <a:t>Click to edit Master text styles</a:t>
             </a:r>
           </a:p>
@@ -2255,7 +2040,7 @@
           <a:p>
             <a:fld id="{5BCAD085-E8A6-8845-BD4E-CB4CCA059FC4}" type="datetimeFigureOut">
               <a:rPr lang="en-US" smtClean="0"/>
-              <a:t>1/27/13</a:t>
+              <a:t>6/24/26</a:t>
             </a:fld>
             <a:endParaRPr lang="en-US"/>
           </a:p>
@@ -2349,10 +2134,9 @@
           <a:lstStyle/>
           <a:p>
             <a:r>
-              <a:rPr lang="en-US" smtClean="0"/>
+              <a:rPr lang="en-US"/>
               <a:t>Click to edit Master title style</a:t>
             </a:r>
-            <a:endParaRPr lang="en-US"/>
           </a:p>
         </p:txBody>
       </p:sp>
@@ -2406,38 +2190,37 @@
           <a:p>
             <a:pPr lvl="0"/>
             <a:r>
-              <a:rPr lang="en-US" smtClean="0"/>
+              <a:rPr lang="en-US"/>
               <a:t>Click to edit Master text styles</a:t>
             </a:r>
           </a:p>
           <a:p>
             <a:pPr lvl="1"/>
             <a:r>
-              <a:rPr lang="en-US" smtClean="0"/>
+              <a:rPr lang="en-US"/>
               <a:t>Second level</a:t>
             </a:r>
           </a:p>
           <a:p>
             <a:pPr lvl="2"/>
             <a:r>
-              <a:rPr lang="en-US" smtClean="0"/>
+              <a:rPr lang="en-US"/>
               <a:t>Third level</a:t>
             </a:r>
           </a:p>
           <a:p>
             <a:pPr lvl="3"/>
             <a:r>
-              <a:rPr lang="en-US" smtClean="0"/>
+              <a:rPr lang="en-US"/>
               <a:t>Fourth level</a:t>
             </a:r>
           </a:p>
           <a:p>
             <a:pPr lvl="4"/>
             <a:r>
-              <a:rPr lang="en-US" smtClean="0"/>
+              <a:rPr lang="en-US"/>
               <a:t>Fifth level</a:t>
             </a:r>
-            <a:endParaRPr lang="en-US"/>
           </a:p>
         </p:txBody>
       </p:sp>
@@ -2491,38 +2274,37 @@
           <a:p>
             <a:pPr lvl="0"/>
             <a:r>
-              <a:rPr lang="en-US" smtClean="0"/>
+              <a:rPr lang="en-US"/>
               <a:t>Click to edit Master text styles</a:t>
             </a:r>
           </a:p>
           <a:p>
             <a:pPr lvl="1"/>
             <a:r>
-              <a:rPr lang="en-US" smtClean="0"/>
+              <a:rPr lang="en-US"/>
               <a:t>Second level</a:t>
             </a:r>
           </a:p>
           <a:p>
             <a:pPr lvl="2"/>
             <a:r>
-              <a:rPr lang="en-US" smtClean="0"/>
+              <a:rPr lang="en-US"/>
               <a:t>Third level</a:t>
             </a:r>
           </a:p>
           <a:p>
             <a:pPr lvl="3"/>
             <a:r>
-              <a:rPr lang="en-US" smtClean="0"/>
+              <a:rPr lang="en-US"/>
               <a:t>Fourth level</a:t>
             </a:r>
           </a:p>
           <a:p>
             <a:pPr lvl="4"/>
             <a:r>
-              <a:rPr lang="en-US" smtClean="0"/>
+              <a:rPr lang="en-US"/>
               <a:t>Fifth level</a:t>
             </a:r>
-            <a:endParaRPr lang="en-US"/>
           </a:p>
         </p:txBody>
       </p:sp>
@@ -2543,7 +2325,7 @@
           <a:p>
             <a:fld id="{5BCAD085-E8A6-8845-BD4E-CB4CCA059FC4}" type="datetimeFigureOut">
               <a:rPr lang="en-US" smtClean="0"/>
-              <a:t>1/27/13</a:t>
+              <a:t>6/24/26</a:t>
             </a:fld>
             <a:endParaRPr lang="en-US"/>
           </a:p>
@@ -2641,10 +2423,9 @@
           </a:lstStyle>
           <a:p>
             <a:r>
-              <a:rPr lang="en-US" smtClean="0"/>
+              <a:rPr lang="en-US"/>
               <a:t>Click to edit Master title style</a:t>
             </a:r>
-            <a:endParaRPr lang="en-US"/>
           </a:p>
         </p:txBody>
       </p:sp>
@@ -2707,7 +2488,7 @@
           <a:p>
             <a:pPr lvl="0"/>
             <a:r>
-              <a:rPr lang="en-US" smtClean="0"/>
+              <a:rPr lang="en-US"/>
               <a:t>Click to edit Master text styles</a:t>
             </a:r>
           </a:p>
@@ -2763,38 +2544,37 @@
           <a:p>
             <a:pPr lvl="0"/>
             <a:r>
-              <a:rPr lang="en-US" smtClean="0"/>
+              <a:rPr lang="en-US"/>
               <a:t>Click to edit Master text styles</a:t>
             </a:r>
           </a:p>
           <a:p>
             <a:pPr lvl="1"/>
             <a:r>
-              <a:rPr lang="en-US" smtClean="0"/>
+              <a:rPr lang="en-US"/>
               <a:t>Second level</a:t>
             </a:r>
           </a:p>
           <a:p>
             <a:pPr lvl="2"/>
             <a:r>
-              <a:rPr lang="en-US" smtClean="0"/>
+              <a:rPr lang="en-US"/>
               <a:t>Third level</a:t>
             </a:r>
           </a:p>
           <a:p>
             <a:pPr lvl="3"/>
             <a:r>
-              <a:rPr lang="en-US" smtClean="0"/>
+              <a:rPr lang="en-US"/>
               <a:t>Fourth level</a:t>
             </a:r>
           </a:p>
           <a:p>
             <a:pPr lvl="4"/>
             <a:r>
-              <a:rPr lang="en-US" smtClean="0"/>
+              <a:rPr lang="en-US"/>
               <a:t>Fifth level</a:t>
             </a:r>
-            <a:endParaRPr lang="en-US"/>
           </a:p>
         </p:txBody>
       </p:sp>
@@ -2857,7 +2637,7 @@
           <a:p>
             <a:pPr lvl="0"/>
             <a:r>
-              <a:rPr lang="en-US" smtClean="0"/>
+              <a:rPr lang="en-US"/>
               <a:t>Click to edit Master text styles</a:t>
             </a:r>
           </a:p>
@@ -2913,38 +2693,37 @@
           <a:p>
             <a:pPr lvl="0"/>
             <a:r>
-              <a:rPr lang="en-US" smtClean="0"/>
+              <a:rPr lang="en-US"/>
               <a:t>Click to edit Master text styles</a:t>
             </a:r>
           </a:p>
           <a:p>
             <a:pPr lvl="1"/>
             <a:r>
-              <a:rPr lang="en-US" smtClean="0"/>
+              <a:rPr lang="en-US"/>
               <a:t>Second level</a:t>
             </a:r>
           </a:p>
           <a:p>
             <a:pPr lvl="2"/>
             <a:r>
-              <a:rPr lang="en-US" smtClean="0"/>
+              <a:rPr lang="en-US"/>
               <a:t>Third level</a:t>
             </a:r>
           </a:p>
           <a:p>
             <a:pPr lvl="3"/>
             <a:r>
-              <a:rPr lang="en-US" smtClean="0"/>
+              <a:rPr lang="en-US"/>
               <a:t>Fourth level</a:t>
             </a:r>
           </a:p>
           <a:p>
             <a:pPr lvl="4"/>
             <a:r>
-              <a:rPr lang="en-US" smtClean="0"/>
+              <a:rPr lang="en-US"/>
               <a:t>Fifth level</a:t>
             </a:r>
-            <a:endParaRPr lang="en-US"/>
           </a:p>
         </p:txBody>
       </p:sp>
@@ -2965,7 +2744,7 @@
           <a:p>
             <a:fld id="{5BCAD085-E8A6-8845-BD4E-CB4CCA059FC4}" type="datetimeFigureOut">
               <a:rPr lang="en-US" smtClean="0"/>
-              <a:t>1/27/13</a:t>
+              <a:t>6/24/26</a:t>
             </a:fld>
             <a:endParaRPr lang="en-US"/>
           </a:p>
@@ -3059,10 +2838,9 @@
           <a:lstStyle/>
           <a:p>
             <a:r>
-              <a:rPr lang="en-US" smtClean="0"/>
+              <a:rPr lang="en-US"/>
               <a:t>Click to edit Master title style</a:t>
             </a:r>
-            <a:endParaRPr lang="en-US"/>
           </a:p>
         </p:txBody>
       </p:sp>
@@ -3083,7 +2861,7 @@
           <a:p>
             <a:fld id="{5BCAD085-E8A6-8845-BD4E-CB4CCA059FC4}" type="datetimeFigureOut">
               <a:rPr lang="en-US" smtClean="0"/>
-              <a:t>1/27/13</a:t>
+              <a:t>6/24/26</a:t>
             </a:fld>
             <a:endParaRPr lang="en-US"/>
           </a:p>
@@ -3178,7 +2956,7 @@
           <a:p>
             <a:fld id="{5BCAD085-E8A6-8845-BD4E-CB4CCA059FC4}" type="datetimeFigureOut">
               <a:rPr lang="en-US" smtClean="0"/>
-              <a:t>1/27/13</a:t>
+              <a:t>6/24/26</a:t>
             </a:fld>
             <a:endParaRPr lang="en-US"/>
           </a:p>
@@ -3281,10 +3059,9 @@
           </a:lstStyle>
           <a:p>
             <a:r>
-              <a:rPr lang="en-US" smtClean="0"/>
+              <a:rPr lang="en-US"/>
               <a:t>Click to edit Master title style</a:t>
             </a:r>
-            <a:endParaRPr lang="en-US"/>
           </a:p>
         </p:txBody>
       </p:sp>
@@ -3338,38 +3115,37 @@
           <a:p>
             <a:pPr lvl="0"/>
             <a:r>
-              <a:rPr lang="en-US" smtClean="0"/>
+              <a:rPr lang="en-US"/>
               <a:t>Click to edit Master text styles</a:t>
             </a:r>
           </a:p>
           <a:p>
             <a:pPr lvl="1"/>
             <a:r>
-              <a:rPr lang="en-US" smtClean="0"/>
+              <a:rPr lang="en-US"/>
               <a:t>Second level</a:t>
             </a:r>
           </a:p>
           <a:p>
             <a:pPr lvl="2"/>
             <a:r>
-              <a:rPr lang="en-US" smtClean="0"/>
+              <a:rPr lang="en-US"/>
               <a:t>Third level</a:t>
             </a:r>
           </a:p>
           <a:p>
             <a:pPr lvl="3"/>
             <a:r>
-              <a:rPr lang="en-US" smtClean="0"/>
+              <a:rPr lang="en-US"/>
               <a:t>Fourth level</a:t>
             </a:r>
           </a:p>
           <a:p>
             <a:pPr lvl="4"/>
             <a:r>
-              <a:rPr lang="en-US" smtClean="0"/>
+              <a:rPr lang="en-US"/>
               <a:t>Fifth level</a:t>
             </a:r>
-            <a:endParaRPr lang="en-US"/>
           </a:p>
         </p:txBody>
       </p:sp>
@@ -3432,7 +3208,7 @@
           <a:p>
             <a:pPr lvl="0"/>
             <a:r>
-              <a:rPr lang="en-US" smtClean="0"/>
+              <a:rPr lang="en-US"/>
               <a:t>Click to edit Master text styles</a:t>
             </a:r>
           </a:p>
@@ -3455,7 +3231,7 @@
           <a:p>
             <a:fld id="{5BCAD085-E8A6-8845-BD4E-CB4CCA059FC4}" type="datetimeFigureOut">
               <a:rPr lang="en-US" smtClean="0"/>
-              <a:t>1/27/13</a:t>
+              <a:t>6/24/26</a:t>
             </a:fld>
             <a:endParaRPr lang="en-US"/>
           </a:p>
@@ -3558,10 +3334,9 @@
           </a:lstStyle>
           <a:p>
             <a:r>
-              <a:rPr lang="en-US" smtClean="0"/>
+              <a:rPr lang="en-US"/>
               <a:t>Click to edit Master title style</a:t>
             </a:r>
-            <a:endParaRPr lang="en-US"/>
           </a:p>
         </p:txBody>
       </p:sp>
@@ -3685,7 +3460,7 @@
           <a:p>
             <a:pPr lvl="0"/>
             <a:r>
-              <a:rPr lang="en-US" smtClean="0"/>
+              <a:rPr lang="en-US"/>
               <a:t>Click to edit Master text styles</a:t>
             </a:r>
           </a:p>
@@ -3708,7 +3483,7 @@
           <a:p>
             <a:fld id="{5BCAD085-E8A6-8845-BD4E-CB4CCA059FC4}" type="datetimeFigureOut">
               <a:rPr lang="en-US" smtClean="0"/>
-              <a:t>1/27/13</a:t>
+              <a:t>6/24/26</a:t>
             </a:fld>
             <a:endParaRPr lang="en-US"/>
           </a:p>
@@ -3817,10 +3592,9 @@
           <a:lstStyle/>
           <a:p>
             <a:r>
-              <a:rPr lang="en-US" smtClean="0"/>
+              <a:rPr lang="en-US"/>
               <a:t>Click to edit Master title style</a:t>
             </a:r>
-            <a:endParaRPr lang="en-US"/>
           </a:p>
         </p:txBody>
       </p:sp>
@@ -3851,38 +3625,37 @@
           <a:p>
             <a:pPr lvl="0"/>
             <a:r>
-              <a:rPr lang="en-US" smtClean="0"/>
+              <a:rPr lang="en-US"/>
               <a:t>Click to edit Master text styles</a:t>
             </a:r>
           </a:p>
           <a:p>
             <a:pPr lvl="1"/>
             <a:r>
-              <a:rPr lang="en-US" smtClean="0"/>
+              <a:rPr lang="en-US"/>
               <a:t>Second level</a:t>
             </a:r>
           </a:p>
           <a:p>
             <a:pPr lvl="2"/>
             <a:r>
-              <a:rPr lang="en-US" smtClean="0"/>
+              <a:rPr lang="en-US"/>
               <a:t>Third level</a:t>
             </a:r>
           </a:p>
           <a:p>
             <a:pPr lvl="3"/>
             <a:r>
-              <a:rPr lang="en-US" smtClean="0"/>
+              <a:rPr lang="en-US"/>
               <a:t>Fourth level</a:t>
             </a:r>
           </a:p>
           <a:p>
             <a:pPr lvl="4"/>
             <a:r>
-              <a:rPr lang="en-US" smtClean="0"/>
+              <a:rPr lang="en-US"/>
               <a:t>Fifth level</a:t>
             </a:r>
-            <a:endParaRPr lang="en-US"/>
           </a:p>
         </p:txBody>
       </p:sp>
@@ -3921,7 +3694,7 @@
           <a:p>
             <a:fld id="{5BCAD085-E8A6-8845-BD4E-CB4CCA059FC4}" type="datetimeFigureOut">
               <a:rPr lang="en-US" smtClean="0"/>
-              <a:t>1/27/13</a:t>
+              <a:t>6/24/26</a:t>
             </a:fld>
             <a:endParaRPr lang="en-US"/>
           </a:p>
@@ -4280,7 +4053,7 @@
 </file>
 
 <file path=ppt/slides/slide1.xml><?xml version="1.0" encoding="utf-8"?>
-<p:sld xmlns:a="http://schemas.openxmlformats.org/drawingml/2006/main" xmlns:p="http://schemas.openxmlformats.org/presentationml/2006/main" xmlns:r="http://schemas.openxmlformats.org/officeDocument/2006/relationships">
+<p:sld xmlns:a="http://schemas.openxmlformats.org/drawingml/2006/main" xmlns:r="http://schemas.openxmlformats.org/officeDocument/2006/relationships" xmlns:p="http://schemas.openxmlformats.org/presentationml/2006/main">
   <p:cSld>
     <p:spTree>
       <p:nvGrpSpPr>
@@ -4288,7 +4061,14 @@
         <p:cNvGrpSpPr/>
         <p:nvPr/>
       </p:nvGrpSpPr>
-      <p:grpSpPr/>
+      <p:grpSpPr>
+        <a:xfrm>
+          <a:off x="0" y="0"/>
+          <a:ext cx="0" cy="0"/>
+          <a:chOff x="0" y="0"/>
+          <a:chExt cx="0" cy="0"/>
+        </a:xfrm>
+      </p:grpSpPr>
       <p:sp>
         <p:nvSpPr>
           <p:cNvPr id="2" name="Rectangle 1"/>
@@ -4330,6 +4110,7 @@
           <a:lstStyle/>
           <a:p>
             <a:pPr algn="ctr"/>
+            <a:endParaRPr/>
           </a:p>
         </p:txBody>
       </p:sp>
@@ -4374,6 +4155,7 @@
           <a:lstStyle/>
           <a:p>
             <a:pPr algn="ctr"/>
+            <a:endParaRPr/>
           </a:p>
         </p:txBody>
       </p:sp>
@@ -4512,7 +4294,7 @@
         <p:spPr>
           <a:xfrm>
             <a:off x="868680" y="5577840"/>
-            <a:ext cx="10607040" cy="822960"/>
+            <a:ext cx="10607040" cy="612540"/>
           </a:xfrm>
           <a:prstGeom prst="rect">
             <a:avLst/>
@@ -4534,7 +4316,7 @@
               </a:spcAft>
             </a:pPr>
             <a:r>
-              <a:rPr sz="1400" b="0">
+              <a:rPr sz="1400" b="0" dirty="0">
                 <a:solidFill>
                   <a:srgbClr val="CFDAF0"/>
                 </a:solidFill>
@@ -4544,7 +4326,7 @@
             </a:r>
           </a:p>
           <a:p>
-            <a:pPr algn="l">
+            <a:pPr>
               <a:lnSpc>
                 <a:spcPct val="105000"/>
               </a:lnSpc>
@@ -4553,14 +4335,83 @@
               </a:spcAft>
             </a:pPr>
             <a:r>
-              <a:rPr sz="1400" b="0">
+              <a:rPr sz="1400" b="0" dirty="0">
                 <a:solidFill>
                   <a:srgbClr val="CFDAF0"/>
                 </a:solidFill>
                 <a:latin typeface="Calibri"/>
               </a:rPr>
-              <a:t>Team: Gilles Hamers, [teammate], [teammate]</a:t>
-            </a:r>
+              <a:t>Team: Gilles Hamers, </a:t>
+            </a:r>
+            <a:r>
+              <a:rPr lang="de-CH" sz="1400" dirty="0">
+                <a:solidFill>
+                  <a:srgbClr val="CFDAF0"/>
+                </a:solidFill>
+                <a:latin typeface="Calibri"/>
+              </a:rPr>
+              <a:t>Lorenz Rösgen</a:t>
+            </a:r>
+            <a:r>
+              <a:rPr sz="1400" b="0" dirty="0">
+                <a:solidFill>
+                  <a:srgbClr val="CFDAF0"/>
+                </a:solidFill>
+                <a:latin typeface="Calibri"/>
+              </a:rPr>
+              <a:t>, </a:t>
+            </a:r>
+            <a:r>
+              <a:rPr lang="de-CH" sz="1400" b="0" dirty="0">
+                <a:solidFill>
+                  <a:srgbClr val="CFDAF0"/>
+                </a:solidFill>
+                <a:latin typeface="Calibri"/>
+              </a:rPr>
+              <a:t>Dan </a:t>
+            </a:r>
+            <a:r>
+              <a:rPr lang="de-CH" sz="1400" b="0" dirty="0" err="1">
+                <a:solidFill>
+                  <a:srgbClr val="CFDAF0"/>
+                </a:solidFill>
+                <a:latin typeface="Calibri"/>
+              </a:rPr>
+              <a:t>Tigu</a:t>
+            </a:r>
+            <a:r>
+              <a:rPr lang="de-CH" sz="1400" b="0" dirty="0">
+                <a:solidFill>
+                  <a:srgbClr val="CFDAF0"/>
+                </a:solidFill>
+                <a:latin typeface="Calibri"/>
+              </a:rPr>
+              <a:t>, Marti </a:t>
+            </a:r>
+            <a:r>
+              <a:rPr lang="de-CH" sz="1400" b="0" dirty="0" err="1">
+                <a:solidFill>
+                  <a:srgbClr val="CFDAF0"/>
+                </a:solidFill>
+                <a:latin typeface="Calibri"/>
+              </a:rPr>
+              <a:t>Solà</a:t>
+            </a:r>
+            <a:r>
+              <a:rPr lang="de-CH" sz="1400" b="0" dirty="0">
+                <a:solidFill>
+                  <a:srgbClr val="CFDAF0"/>
+                </a:solidFill>
+                <a:latin typeface="Calibri"/>
+              </a:rPr>
+              <a:t> Puig </a:t>
+            </a:r>
+            <a:endParaRPr sz="1400" b="0" dirty="0">
+              <a:solidFill>
+                <a:srgbClr val="CFDAF0"/>
+              </a:solidFill>
+              <a:latin typeface="Calibri"/>
+            </a:endParaRPr>
           </a:p>
         </p:txBody>
       </p:sp>
@@ -4573,7 +4424,7 @@
 </file>
 
 <file path=ppt/slides/slide10.xml><?xml version="1.0" encoding="utf-8"?>
-<p:sld xmlns:a="http://schemas.openxmlformats.org/drawingml/2006/main" xmlns:p="http://schemas.openxmlformats.org/presentationml/2006/main" xmlns:r="http://schemas.openxmlformats.org/officeDocument/2006/relationships">
+<p:sld xmlns:a="http://schemas.openxmlformats.org/drawingml/2006/main" xmlns:r="http://schemas.openxmlformats.org/officeDocument/2006/relationships" xmlns:p="http://schemas.openxmlformats.org/presentationml/2006/main">
   <p:cSld>
     <p:spTree>
       <p:nvGrpSpPr>
@@ -4581,7 +4432,14 @@
         <p:cNvGrpSpPr/>
         <p:nvPr/>
       </p:nvGrpSpPr>
-      <p:grpSpPr/>
+      <p:grpSpPr>
+        <a:xfrm>
+          <a:off x="0" y="0"/>
+          <a:ext cx="0" cy="0"/>
+          <a:chOff x="0" y="0"/>
+          <a:chExt cx="0" cy="0"/>
+        </a:xfrm>
+      </p:grpSpPr>
       <p:sp>
         <p:nvSpPr>
           <p:cNvPr id="2" name="Rectangle 1"/>
@@ -4623,6 +4481,7 @@
           <a:lstStyle/>
           <a:p>
             <a:pPr algn="ctr"/>
+            <a:endParaRPr/>
           </a:p>
         </p:txBody>
       </p:sp>
@@ -4751,6 +4610,7 @@
           <a:lstStyle/>
           <a:p>
             <a:pPr algn="ctr"/>
+            <a:endParaRPr/>
           </a:p>
         </p:txBody>
       </p:sp>
@@ -4773,8 +4633,20 @@
                 <a:tableStyleId>{5C22544A-7EE6-4342-B048-85BDC9FD1C3A}</a:tableStyleId>
               </a:tblPr>
               <a:tblGrid>
-                <a:gridCol w="3931920"/>
-                <a:gridCol w="7132320"/>
+                <a:gridCol w="3931920">
+                  <a:extLst>
+                    <a:ext uri="{9D8B030D-6E8A-4147-A177-3AD203B41FA5}">
+                      <a16:colId xmlns:a16="http://schemas.microsoft.com/office/drawing/2014/main" val="20000"/>
+                    </a:ext>
+                  </a:extLst>
+                </a:gridCol>
+                <a:gridCol w="7132320">
+                  <a:extLst>
+                    <a:ext uri="{9D8B030D-6E8A-4147-A177-3AD203B41FA5}">
+                      <a16:colId xmlns:a16="http://schemas.microsoft.com/office/drawing/2014/main" val="20001"/>
+                    </a:ext>
+                  </a:extLst>
+                </a:gridCol>
               </a:tblGrid>
               <a:tr h="548640">
                 <a:tc>
@@ -4821,6 +4693,11 @@
                     </a:solidFill>
                   </a:tcPr>
                 </a:tc>
+                <a:extLst>
+                  <a:ext uri="{0D108BD9-81ED-4DB2-BD59-A6C34878D82A}">
+                    <a16:rowId xmlns:a16="http://schemas.microsoft.com/office/drawing/2014/main" val="10000"/>
+                  </a:ext>
+                </a:extLst>
               </a:tr>
               <a:tr h="548640">
                 <a:tc>
@@ -4867,6 +4744,11 @@
                     </a:solidFill>
                   </a:tcPr>
                 </a:tc>
+                <a:extLst>
+                  <a:ext uri="{0D108BD9-81ED-4DB2-BD59-A6C34878D82A}">
+                    <a16:rowId xmlns:a16="http://schemas.microsoft.com/office/drawing/2014/main" val="10001"/>
+                  </a:ext>
+                </a:extLst>
               </a:tr>
               <a:tr h="548640">
                 <a:tc>
@@ -4913,6 +4795,11 @@
                     </a:solidFill>
                   </a:tcPr>
                 </a:tc>
+                <a:extLst>
+                  <a:ext uri="{0D108BD9-81ED-4DB2-BD59-A6C34878D82A}">
+                    <a16:rowId xmlns:a16="http://schemas.microsoft.com/office/drawing/2014/main" val="10002"/>
+                  </a:ext>
+                </a:extLst>
               </a:tr>
               <a:tr h="548640">
                 <a:tc>
@@ -4959,6 +4846,11 @@
                     </a:solidFill>
                   </a:tcPr>
                 </a:tc>
+                <a:extLst>
+                  <a:ext uri="{0D108BD9-81ED-4DB2-BD59-A6C34878D82A}">
+                    <a16:rowId xmlns:a16="http://schemas.microsoft.com/office/drawing/2014/main" val="10003"/>
+                  </a:ext>
+                </a:extLst>
               </a:tr>
               <a:tr h="548640">
                 <a:tc>
@@ -5005,6 +4897,11 @@
                     </a:solidFill>
                   </a:tcPr>
                 </a:tc>
+                <a:extLst>
+                  <a:ext uri="{0D108BD9-81ED-4DB2-BD59-A6C34878D82A}">
+                    <a16:rowId xmlns:a16="http://schemas.microsoft.com/office/drawing/2014/main" val="10004"/>
+                  </a:ext>
+                </a:extLst>
               </a:tr>
               <a:tr h="548640">
                 <a:tc>
@@ -5051,6 +4948,11 @@
                     </a:solidFill>
                   </a:tcPr>
                 </a:tc>
+                <a:extLst>
+                  <a:ext uri="{0D108BD9-81ED-4DB2-BD59-A6C34878D82A}">
+                    <a16:rowId xmlns:a16="http://schemas.microsoft.com/office/drawing/2014/main" val="10005"/>
+                  </a:ext>
+                </a:extLst>
               </a:tr>
             </a:tbl>
           </a:graphicData>
@@ -5097,6 +4999,7 @@
           <a:lstStyle/>
           <a:p>
             <a:pPr algn="ctr"/>
+            <a:endParaRPr/>
           </a:p>
         </p:txBody>
       </p:sp>
@@ -5192,75 +5095,7 @@
           <a:lstStyle/>
           <a:p>
             <a:pPr algn="ctr"/>
-          </a:p>
-        </p:txBody>
-      </p:sp>
-      <p:sp>
-        <p:nvSpPr>
-          <p:cNvPr id="10" name="TextBox 9"/>
-          <p:cNvSpPr txBox="1"/>
-          <p:nvPr/>
-        </p:nvSpPr>
-        <p:spPr>
-          <a:xfrm>
-            <a:off x="502920" y="6519672"/>
-            <a:ext cx="11155680" cy="310896"/>
-          </a:xfrm>
-          <a:prstGeom prst="rect">
-            <a:avLst/>
-          </a:prstGeom>
-          <a:noFill/>
-        </p:spPr>
-        <p:txBody>
-          <a:bodyPr wrap="square" anchor="ctr">
-            <a:spAutoFit/>
-          </a:bodyPr>
-          <a:lstStyle/>
-          <a:p>
-            <a:pPr algn="l">
-              <a:lnSpc>
-                <a:spcPct val="105000"/>
-              </a:lnSpc>
-              <a:spcAft>
-                <a:spcPts val="600"/>
-              </a:spcAft>
-            </a:pPr>
-            <a:r>
-              <a:rPr sz="1100" b="1">
-                <a:solidFill>
-                  <a:srgbClr val="0A1F6B"/>
-                </a:solidFill>
-                <a:latin typeface="Calibri"/>
-              </a:rPr>
-              <a:t>Rubric: </a:t>
-            </a:r>
-            <a:r>
-              <a:rPr sz="1100" b="0">
-                <a:solidFill>
-                  <a:srgbClr val="555555"/>
-                </a:solidFill>
-                <a:latin typeface="Calibri"/>
-              </a:rPr>
-              <a:t>Risk Awareness and Mitigation (15 pts)</a:t>
-            </a:r>
-            <a:r>
-              <a:rPr sz="1100" b="1">
-                <a:solidFill>
-                  <a:srgbClr val="0A1F6B"/>
-                </a:solidFill>
-                <a:latin typeface="Calibri"/>
-              </a:rPr>
-              <a:t>     |     Handout / docs: </a:t>
-            </a:r>
-            <a:r>
-              <a:rPr sz="1100" b="0">
-                <a:solidFill>
-                  <a:srgbClr val="555555"/>
-                </a:solidFill>
-                <a:latin typeface="Calibri"/>
-              </a:rPr>
-              <a:t>Handout 6 | docs/02 sec 6, docs/06</a:t>
-            </a:r>
+            <a:endParaRPr/>
           </a:p>
         </p:txBody>
       </p:sp>
@@ -5273,7 +5108,7 @@
 </file>
 
 <file path=ppt/slides/slide11.xml><?xml version="1.0" encoding="utf-8"?>
-<p:sld xmlns:a="http://schemas.openxmlformats.org/drawingml/2006/main" xmlns:p="http://schemas.openxmlformats.org/presentationml/2006/main" xmlns:r="http://schemas.openxmlformats.org/officeDocument/2006/relationships">
+<p:sld xmlns:a="http://schemas.openxmlformats.org/drawingml/2006/main" xmlns:r="http://schemas.openxmlformats.org/officeDocument/2006/relationships" xmlns:p="http://schemas.openxmlformats.org/presentationml/2006/main">
   <p:cSld>
     <p:spTree>
       <p:nvGrpSpPr>
@@ -5281,7 +5116,14 @@
         <p:cNvGrpSpPr/>
         <p:nvPr/>
       </p:nvGrpSpPr>
-      <p:grpSpPr/>
+      <p:grpSpPr>
+        <a:xfrm>
+          <a:off x="0" y="0"/>
+          <a:ext cx="0" cy="0"/>
+          <a:chOff x="0" y="0"/>
+          <a:chExt cx="0" cy="0"/>
+        </a:xfrm>
+      </p:grpSpPr>
       <p:sp>
         <p:nvSpPr>
           <p:cNvPr id="2" name="Rectangle 1"/>
@@ -5323,6 +5165,7 @@
           <a:lstStyle/>
           <a:p>
             <a:pPr algn="ctr"/>
+            <a:endParaRPr/>
           </a:p>
         </p:txBody>
       </p:sp>
@@ -5451,6 +5294,7 @@
           <a:lstStyle/>
           <a:p>
             <a:pPr algn="ctr"/>
+            <a:endParaRPr/>
           </a:p>
         </p:txBody>
       </p:sp>
@@ -5473,9 +5317,27 @@
                 <a:tableStyleId>{5C22544A-7EE6-4342-B048-85BDC9FD1C3A}</a:tableStyleId>
               </a:tblPr>
               <a:tblGrid>
-                <a:gridCol w="1920240"/>
-                <a:gridCol w="4297680"/>
-                <a:gridCol w="4846320"/>
+                <a:gridCol w="1920240">
+                  <a:extLst>
+                    <a:ext uri="{9D8B030D-6E8A-4147-A177-3AD203B41FA5}">
+                      <a16:colId xmlns:a16="http://schemas.microsoft.com/office/drawing/2014/main" val="20000"/>
+                    </a:ext>
+                  </a:extLst>
+                </a:gridCol>
+                <a:gridCol w="4297680">
+                  <a:extLst>
+                    <a:ext uri="{9D8B030D-6E8A-4147-A177-3AD203B41FA5}">
+                      <a16:colId xmlns:a16="http://schemas.microsoft.com/office/drawing/2014/main" val="20001"/>
+                    </a:ext>
+                  </a:extLst>
+                </a:gridCol>
+                <a:gridCol w="4846320">
+                  <a:extLst>
+                    <a:ext uri="{9D8B030D-6E8A-4147-A177-3AD203B41FA5}">
+                      <a16:colId xmlns:a16="http://schemas.microsoft.com/office/drawing/2014/main" val="20002"/>
+                    </a:ext>
+                  </a:extLst>
+                </a:gridCol>
               </a:tblGrid>
               <a:tr h="603504">
                 <a:tc>
@@ -5544,6 +5406,11 @@
                     </a:solidFill>
                   </a:tcPr>
                 </a:tc>
+                <a:extLst>
+                  <a:ext uri="{0D108BD9-81ED-4DB2-BD59-A6C34878D82A}">
+                    <a16:rowId xmlns:a16="http://schemas.microsoft.com/office/drawing/2014/main" val="10000"/>
+                  </a:ext>
+                </a:extLst>
               </a:tr>
               <a:tr h="603504">
                 <a:tc>
@@ -5612,6 +5479,11 @@
                     </a:solidFill>
                   </a:tcPr>
                 </a:tc>
+                <a:extLst>
+                  <a:ext uri="{0D108BD9-81ED-4DB2-BD59-A6C34878D82A}">
+                    <a16:rowId xmlns:a16="http://schemas.microsoft.com/office/drawing/2014/main" val="10001"/>
+                  </a:ext>
+                </a:extLst>
               </a:tr>
               <a:tr h="603504">
                 <a:tc>
@@ -5680,6 +5552,11 @@
                     </a:solidFill>
                   </a:tcPr>
                 </a:tc>
+                <a:extLst>
+                  <a:ext uri="{0D108BD9-81ED-4DB2-BD59-A6C34878D82A}">
+                    <a16:rowId xmlns:a16="http://schemas.microsoft.com/office/drawing/2014/main" val="10002"/>
+                  </a:ext>
+                </a:extLst>
               </a:tr>
               <a:tr h="603504">
                 <a:tc>
@@ -5748,6 +5625,11 @@
                     </a:solidFill>
                   </a:tcPr>
                 </a:tc>
+                <a:extLst>
+                  <a:ext uri="{0D108BD9-81ED-4DB2-BD59-A6C34878D82A}">
+                    <a16:rowId xmlns:a16="http://schemas.microsoft.com/office/drawing/2014/main" val="10003"/>
+                  </a:ext>
+                </a:extLst>
               </a:tr>
               <a:tr h="603504">
                 <a:tc>
@@ -5816,6 +5698,11 @@
                     </a:solidFill>
                   </a:tcPr>
                 </a:tc>
+                <a:extLst>
+                  <a:ext uri="{0D108BD9-81ED-4DB2-BD59-A6C34878D82A}">
+                    <a16:rowId xmlns:a16="http://schemas.microsoft.com/office/drawing/2014/main" val="10004"/>
+                  </a:ext>
+                </a:extLst>
               </a:tr>
               <a:tr h="603504">
                 <a:tc>
@@ -5884,6 +5771,11 @@
                     </a:solidFill>
                   </a:tcPr>
                 </a:tc>
+                <a:extLst>
+                  <a:ext uri="{0D108BD9-81ED-4DB2-BD59-A6C34878D82A}">
+                    <a16:rowId xmlns:a16="http://schemas.microsoft.com/office/drawing/2014/main" val="10005"/>
+                  </a:ext>
+                </a:extLst>
               </a:tr>
             </a:tbl>
           </a:graphicData>
@@ -5930,75 +5822,7 @@
           <a:lstStyle/>
           <a:p>
             <a:pPr algn="ctr"/>
-          </a:p>
-        </p:txBody>
-      </p:sp>
-      <p:sp>
-        <p:nvSpPr>
-          <p:cNvPr id="8" name="TextBox 7"/>
-          <p:cNvSpPr txBox="1"/>
-          <p:nvPr/>
-        </p:nvSpPr>
-        <p:spPr>
-          <a:xfrm>
-            <a:off x="502920" y="6519672"/>
-            <a:ext cx="11155680" cy="310896"/>
-          </a:xfrm>
-          <a:prstGeom prst="rect">
-            <a:avLst/>
-          </a:prstGeom>
-          <a:noFill/>
-        </p:spPr>
-        <p:txBody>
-          <a:bodyPr wrap="square" anchor="ctr">
-            <a:spAutoFit/>
-          </a:bodyPr>
-          <a:lstStyle/>
-          <a:p>
-            <a:pPr algn="l">
-              <a:lnSpc>
-                <a:spcPct val="105000"/>
-              </a:lnSpc>
-              <a:spcAft>
-                <a:spcPts val="600"/>
-              </a:spcAft>
-            </a:pPr>
-            <a:r>
-              <a:rPr sz="1100" b="1">
-                <a:solidFill>
-                  <a:srgbClr val="0A1F6B"/>
-                </a:solidFill>
-                <a:latin typeface="Calibri"/>
-              </a:rPr>
-              <a:t>Rubric: </a:t>
-            </a:r>
-            <a:r>
-              <a:rPr sz="1100" b="0">
-                <a:solidFill>
-                  <a:srgbClr val="555555"/>
-                </a:solidFill>
-                <a:latin typeface="Calibri"/>
-              </a:rPr>
-              <a:t>Architecture (10 pts) + Feasibility (15 pts)</a:t>
-            </a:r>
-            <a:r>
-              <a:rPr sz="1100" b="1">
-                <a:solidFill>
-                  <a:srgbClr val="0A1F6B"/>
-                </a:solidFill>
-                <a:latin typeface="Calibri"/>
-              </a:rPr>
-              <a:t>     |     Handout / docs: </a:t>
-            </a:r>
-            <a:r>
-              <a:rPr sz="1100" b="0">
-                <a:solidFill>
-                  <a:srgbClr val="555555"/>
-                </a:solidFill>
-                <a:latin typeface="Calibri"/>
-              </a:rPr>
-              <a:t>Handout 8 | docs/02 sec 8</a:t>
-            </a:r>
+            <a:endParaRPr/>
           </a:p>
         </p:txBody>
       </p:sp>
@@ -6011,7 +5835,7 @@
 </file>
 
 <file path=ppt/slides/slide12.xml><?xml version="1.0" encoding="utf-8"?>
-<p:sld xmlns:a="http://schemas.openxmlformats.org/drawingml/2006/main" xmlns:p="http://schemas.openxmlformats.org/presentationml/2006/main" xmlns:r="http://schemas.openxmlformats.org/officeDocument/2006/relationships">
+<p:sld xmlns:a="http://schemas.openxmlformats.org/drawingml/2006/main" xmlns:r="http://schemas.openxmlformats.org/officeDocument/2006/relationships" xmlns:p="http://schemas.openxmlformats.org/presentationml/2006/main">
   <p:cSld>
     <p:spTree>
       <p:nvGrpSpPr>
@@ -6019,7 +5843,14 @@
         <p:cNvGrpSpPr/>
         <p:nvPr/>
       </p:nvGrpSpPr>
-      <p:grpSpPr/>
+      <p:grpSpPr>
+        <a:xfrm>
+          <a:off x="0" y="0"/>
+          <a:ext cx="0" cy="0"/>
+          <a:chOff x="0" y="0"/>
+          <a:chExt cx="0" cy="0"/>
+        </a:xfrm>
+      </p:grpSpPr>
       <p:sp>
         <p:nvSpPr>
           <p:cNvPr id="2" name="Rectangle 1"/>
@@ -6061,6 +5892,7 @@
           <a:lstStyle/>
           <a:p>
             <a:pPr algn="ctr"/>
+            <a:endParaRPr/>
           </a:p>
         </p:txBody>
       </p:sp>
@@ -6189,6 +6021,7 @@
           <a:lstStyle/>
           <a:p>
             <a:pPr algn="ctr"/>
+            <a:endParaRPr/>
           </a:p>
         </p:txBody>
       </p:sp>
@@ -6567,6 +6400,7 @@
           <a:lstStyle/>
           <a:p>
             <a:pPr algn="ctr"/>
+            <a:endParaRPr/>
           </a:p>
         </p:txBody>
       </p:sp>
@@ -6662,75 +6496,7 @@
           <a:lstStyle/>
           <a:p>
             <a:pPr algn="ctr"/>
-          </a:p>
-        </p:txBody>
-      </p:sp>
-      <p:sp>
-        <p:nvSpPr>
-          <p:cNvPr id="13" name="TextBox 12"/>
-          <p:cNvSpPr txBox="1"/>
-          <p:nvPr/>
-        </p:nvSpPr>
-        <p:spPr>
-          <a:xfrm>
-            <a:off x="502920" y="6519672"/>
-            <a:ext cx="11155680" cy="310896"/>
-          </a:xfrm>
-          <a:prstGeom prst="rect">
-            <a:avLst/>
-          </a:prstGeom>
-          <a:noFill/>
-        </p:spPr>
-        <p:txBody>
-          <a:bodyPr wrap="square" anchor="ctr">
-            <a:spAutoFit/>
-          </a:bodyPr>
-          <a:lstStyle/>
-          <a:p>
-            <a:pPr algn="l">
-              <a:lnSpc>
-                <a:spcPct val="105000"/>
-              </a:lnSpc>
-              <a:spcAft>
-                <a:spcPts val="600"/>
-              </a:spcAft>
-            </a:pPr>
-            <a:r>
-              <a:rPr sz="1100" b="1">
-                <a:solidFill>
-                  <a:srgbClr val="0A1F6B"/>
-                </a:solidFill>
-                <a:latin typeface="Calibri"/>
-              </a:rPr>
-              <a:t>Rubric: </a:t>
-            </a:r>
-            <a:r>
-              <a:rPr sz="1100" b="0">
-                <a:solidFill>
-                  <a:srgbClr val="555555"/>
-                </a:solidFill>
-                <a:latin typeface="Calibri"/>
-              </a:rPr>
-              <a:t>Clarity, Presentation Quality &amp; Creativity (20 pts)</a:t>
-            </a:r>
-            <a:r>
-              <a:rPr sz="1100" b="1">
-                <a:solidFill>
-                  <a:srgbClr val="0A1F6B"/>
-                </a:solidFill>
-                <a:latin typeface="Calibri"/>
-              </a:rPr>
-              <a:t>     |     Handout / docs: </a:t>
-            </a:r>
-            <a:r>
-              <a:rPr sz="1100" b="0">
-                <a:solidFill>
-                  <a:srgbClr val="555555"/>
-                </a:solidFill>
-                <a:latin typeface="Calibri"/>
-              </a:rPr>
-              <a:t>Assignment: benefits + next steps</a:t>
-            </a:r>
+            <a:endParaRPr/>
           </a:p>
         </p:txBody>
       </p:sp>
@@ -6743,7 +6509,7 @@
 </file>
 
 <file path=ppt/slides/slide2.xml><?xml version="1.0" encoding="utf-8"?>
-<p:sld xmlns:a="http://schemas.openxmlformats.org/drawingml/2006/main" xmlns:p="http://schemas.openxmlformats.org/presentationml/2006/main" xmlns:r="http://schemas.openxmlformats.org/officeDocument/2006/relationships">
+<p:sld xmlns:a="http://schemas.openxmlformats.org/drawingml/2006/main" xmlns:r="http://schemas.openxmlformats.org/officeDocument/2006/relationships" xmlns:p="http://schemas.openxmlformats.org/presentationml/2006/main">
   <p:cSld>
     <p:spTree>
       <p:nvGrpSpPr>
@@ -6751,7 +6517,14 @@
         <p:cNvGrpSpPr/>
         <p:nvPr/>
       </p:nvGrpSpPr>
-      <p:grpSpPr/>
+      <p:grpSpPr>
+        <a:xfrm>
+          <a:off x="0" y="0"/>
+          <a:ext cx="0" cy="0"/>
+          <a:chOff x="0" y="0"/>
+          <a:chExt cx="0" cy="0"/>
+        </a:xfrm>
+      </p:grpSpPr>
       <p:sp>
         <p:nvSpPr>
           <p:cNvPr id="2" name="Rectangle 1"/>
@@ -6793,6 +6566,7 @@
           <a:lstStyle/>
           <a:p>
             <a:pPr algn="ctr"/>
+            <a:endParaRPr/>
           </a:p>
         </p:txBody>
       </p:sp>
@@ -6921,6 +6695,7 @@
           <a:lstStyle/>
           <a:p>
             <a:pPr algn="ctr"/>
+            <a:endParaRPr/>
           </a:p>
         </p:txBody>
       </p:sp>
@@ -6965,6 +6740,7 @@
           <a:lstStyle/>
           <a:p>
             <a:pPr algn="ctr"/>
+            <a:endParaRPr/>
           </a:p>
         </p:txBody>
       </p:sp>
@@ -7330,75 +7106,7 @@
           <a:lstStyle/>
           <a:p>
             <a:pPr algn="ctr"/>
-          </a:p>
-        </p:txBody>
-      </p:sp>
-      <p:sp>
-        <p:nvSpPr>
-          <p:cNvPr id="13" name="TextBox 12"/>
-          <p:cNvSpPr txBox="1"/>
-          <p:nvPr/>
-        </p:nvSpPr>
-        <p:spPr>
-          <a:xfrm>
-            <a:off x="502920" y="6519672"/>
-            <a:ext cx="11155680" cy="310896"/>
-          </a:xfrm>
-          <a:prstGeom prst="rect">
-            <a:avLst/>
-          </a:prstGeom>
-          <a:noFill/>
-        </p:spPr>
-        <p:txBody>
-          <a:bodyPr wrap="square" anchor="ctr">
-            <a:spAutoFit/>
-          </a:bodyPr>
-          <a:lstStyle/>
-          <a:p>
-            <a:pPr algn="l">
-              <a:lnSpc>
-                <a:spcPct val="105000"/>
-              </a:lnSpc>
-              <a:spcAft>
-                <a:spcPts val="600"/>
-              </a:spcAft>
-            </a:pPr>
-            <a:r>
-              <a:rPr sz="1100" b="1">
-                <a:solidFill>
-                  <a:srgbClr val="0A1F6B"/>
-                </a:solidFill>
-                <a:latin typeface="Calibri"/>
-              </a:rPr>
-              <a:t>Rubric: </a:t>
-            </a:r>
-            <a:r>
-              <a:rPr sz="1100" b="0">
-                <a:solidFill>
-                  <a:srgbClr val="555555"/>
-                </a:solidFill>
-                <a:latin typeface="Calibri"/>
-              </a:rPr>
-              <a:t>Problem Framing, Agent Goals &amp; Prompt (15 pts)</a:t>
-            </a:r>
-            <a:r>
-              <a:rPr sz="1100" b="1">
-                <a:solidFill>
-                  <a:srgbClr val="0A1F6B"/>
-                </a:solidFill>
-                <a:latin typeface="Calibri"/>
-              </a:rPr>
-              <a:t>     |     Handout / docs: </a:t>
-            </a:r>
-            <a:r>
-              <a:rPr sz="1100" b="0">
-                <a:solidFill>
-                  <a:srgbClr val="555555"/>
-                </a:solidFill>
-                <a:latin typeface="Calibri"/>
-              </a:rPr>
-              <a:t>Handout 1 | docs/02 sec 1</a:t>
-            </a:r>
+            <a:endParaRPr/>
           </a:p>
         </p:txBody>
       </p:sp>
@@ -7411,7 +7119,7 @@
 </file>
 
 <file path=ppt/slides/slide3.xml><?xml version="1.0" encoding="utf-8"?>
-<p:sld xmlns:a="http://schemas.openxmlformats.org/drawingml/2006/main" xmlns:p="http://schemas.openxmlformats.org/presentationml/2006/main" xmlns:r="http://schemas.openxmlformats.org/officeDocument/2006/relationships">
+<p:sld xmlns:a="http://schemas.openxmlformats.org/drawingml/2006/main" xmlns:r="http://schemas.openxmlformats.org/officeDocument/2006/relationships" xmlns:p="http://schemas.openxmlformats.org/presentationml/2006/main">
   <p:cSld>
     <p:spTree>
       <p:nvGrpSpPr>
@@ -7419,7 +7127,14 @@
         <p:cNvGrpSpPr/>
         <p:nvPr/>
       </p:nvGrpSpPr>
-      <p:grpSpPr/>
+      <p:grpSpPr>
+        <a:xfrm>
+          <a:off x="0" y="0"/>
+          <a:ext cx="0" cy="0"/>
+          <a:chOff x="0" y="0"/>
+          <a:chExt cx="0" cy="0"/>
+        </a:xfrm>
+      </p:grpSpPr>
       <p:sp>
         <p:nvSpPr>
           <p:cNvPr id="2" name="Rectangle 1"/>
@@ -7461,6 +7176,7 @@
           <a:lstStyle/>
           <a:p>
             <a:pPr algn="ctr"/>
+            <a:endParaRPr/>
           </a:p>
         </p:txBody>
       </p:sp>
@@ -7589,6 +7305,7 @@
           <a:lstStyle/>
           <a:p>
             <a:pPr algn="ctr"/>
+            <a:endParaRPr/>
           </a:p>
         </p:txBody>
       </p:sp>
@@ -7611,8 +7328,20 @@
                 <a:tableStyleId>{5C22544A-7EE6-4342-B048-85BDC9FD1C3A}</a:tableStyleId>
               </a:tblPr>
               <a:tblGrid>
-                <a:gridCol w="2468880"/>
-                <a:gridCol w="8595360"/>
+                <a:gridCol w="2468880">
+                  <a:extLst>
+                    <a:ext uri="{9D8B030D-6E8A-4147-A177-3AD203B41FA5}">
+                      <a16:colId xmlns:a16="http://schemas.microsoft.com/office/drawing/2014/main" val="20000"/>
+                    </a:ext>
+                  </a:extLst>
+                </a:gridCol>
+                <a:gridCol w="8595360">
+                  <a:extLst>
+                    <a:ext uri="{9D8B030D-6E8A-4147-A177-3AD203B41FA5}">
+                      <a16:colId xmlns:a16="http://schemas.microsoft.com/office/drawing/2014/main" val="20001"/>
+                    </a:ext>
+                  </a:extLst>
+                </a:gridCol>
               </a:tblGrid>
               <a:tr h="713232">
                 <a:tc>
@@ -7659,6 +7388,11 @@
                     </a:solidFill>
                   </a:tcPr>
                 </a:tc>
+                <a:extLst>
+                  <a:ext uri="{0D108BD9-81ED-4DB2-BD59-A6C34878D82A}">
+                    <a16:rowId xmlns:a16="http://schemas.microsoft.com/office/drawing/2014/main" val="10000"/>
+                  </a:ext>
+                </a:extLst>
               </a:tr>
               <a:tr h="713232">
                 <a:tc>
@@ -7705,6 +7439,11 @@
                     </a:solidFill>
                   </a:tcPr>
                 </a:tc>
+                <a:extLst>
+                  <a:ext uri="{0D108BD9-81ED-4DB2-BD59-A6C34878D82A}">
+                    <a16:rowId xmlns:a16="http://schemas.microsoft.com/office/drawing/2014/main" val="10001"/>
+                  </a:ext>
+                </a:extLst>
               </a:tr>
               <a:tr h="713232">
                 <a:tc>
@@ -7751,6 +7490,11 @@
                     </a:solidFill>
                   </a:tcPr>
                 </a:tc>
+                <a:extLst>
+                  <a:ext uri="{0D108BD9-81ED-4DB2-BD59-A6C34878D82A}">
+                    <a16:rowId xmlns:a16="http://schemas.microsoft.com/office/drawing/2014/main" val="10002"/>
+                  </a:ext>
+                </a:extLst>
               </a:tr>
               <a:tr h="713232">
                 <a:tc>
@@ -7797,6 +7541,11 @@
                     </a:solidFill>
                   </a:tcPr>
                 </a:tc>
+                <a:extLst>
+                  <a:ext uri="{0D108BD9-81ED-4DB2-BD59-A6C34878D82A}">
+                    <a16:rowId xmlns:a16="http://schemas.microsoft.com/office/drawing/2014/main" val="10003"/>
+                  </a:ext>
+                </a:extLst>
               </a:tr>
             </a:tbl>
           </a:graphicData>
@@ -7811,7 +7560,7 @@
         <p:spPr>
           <a:xfrm>
             <a:off x="548640" y="4160520"/>
-            <a:ext cx="11064240" cy="411480"/>
+            <a:ext cx="11064240" cy="324897"/>
           </a:xfrm>
           <a:prstGeom prst="rect">
             <a:avLst/>
@@ -7833,13 +7582,13 @@
               </a:spcAft>
             </a:pPr>
             <a:r>
-              <a:rPr sz="1500" b="1">
+              <a:rPr sz="1500" b="1" dirty="0">
                 <a:solidFill>
                   <a:srgbClr val="0A1F6B"/>
                 </a:solidFill>
                 <a:latin typeface="Calibri"/>
               </a:rPr>
-              <a:t>Memory model (Session 2):</a:t>
+              <a:t>Memory model:</a:t>
             </a:r>
           </a:p>
         </p:txBody>
@@ -7850,7 +7599,13 @@
           <p:cNvGraphicFramePr>
             <a:graphicFrameLocks noGrp="1"/>
           </p:cNvGraphicFramePr>
-          <p:nvPr/>
+          <p:nvPr>
+            <p:extLst>
+              <p:ext uri="{D42A27DB-BD31-4B8C-83A1-F6EECF244321}">
+                <p14:modId xmlns:p14="http://schemas.microsoft.com/office/powerpoint/2010/main" val="2402944649"/>
+              </p:ext>
+            </p:extLst>
+          </p:nvPr>
         </p:nvGraphicFramePr>
         <p:xfrm>
           <a:off x="548640" y="4572000"/>
@@ -7863,10 +7618,34 @@
                 <a:tableStyleId>{5C22544A-7EE6-4342-B048-85BDC9FD1C3A}</a:tableStyleId>
               </a:tblPr>
               <a:tblGrid>
-                <a:gridCol w="2743200"/>
-                <a:gridCol w="2926080"/>
-                <a:gridCol w="2743200"/>
-                <a:gridCol w="2651760"/>
+                <a:gridCol w="2743200">
+                  <a:extLst>
+                    <a:ext uri="{9D8B030D-6E8A-4147-A177-3AD203B41FA5}">
+                      <a16:colId xmlns:a16="http://schemas.microsoft.com/office/drawing/2014/main" val="20000"/>
+                    </a:ext>
+                  </a:extLst>
+                </a:gridCol>
+                <a:gridCol w="2926080">
+                  <a:extLst>
+                    <a:ext uri="{9D8B030D-6E8A-4147-A177-3AD203B41FA5}">
+                      <a16:colId xmlns:a16="http://schemas.microsoft.com/office/drawing/2014/main" val="20001"/>
+                    </a:ext>
+                  </a:extLst>
+                </a:gridCol>
+                <a:gridCol w="2743200">
+                  <a:extLst>
+                    <a:ext uri="{9D8B030D-6E8A-4147-A177-3AD203B41FA5}">
+                      <a16:colId xmlns:a16="http://schemas.microsoft.com/office/drawing/2014/main" val="20002"/>
+                    </a:ext>
+                  </a:extLst>
+                </a:gridCol>
+                <a:gridCol w="2651760">
+                  <a:extLst>
+                    <a:ext uri="{9D8B030D-6E8A-4147-A177-3AD203B41FA5}">
+                      <a16:colId xmlns:a16="http://schemas.microsoft.com/office/drawing/2014/main" val="20003"/>
+                    </a:ext>
+                  </a:extLst>
+                </a:gridCol>
               </a:tblGrid>
               <a:tr h="868680">
                 <a:tc>
@@ -7875,7 +7654,7 @@
                     <a:lstStyle/>
                     <a:p>
                       <a:r>
-                        <a:rPr sz="1200" b="1">
+                        <a:rPr sz="1200" b="1" dirty="0">
                           <a:solidFill>
                             <a:srgbClr val="FFFFFF"/>
                           </a:solidFill>
@@ -7885,7 +7664,7 @@
                       </a:r>
                     </a:p>
                   </a:txBody>
-                  <a:tcPr>
+                  <a:tcPr anchor="ctr">
                     <a:solidFill>
                       <a:srgbClr val="0A1F6B"/>
                     </a:solidFill>
@@ -7897,7 +7676,7 @@
                     <a:lstStyle/>
                     <a:p>
                       <a:r>
-                        <a:rPr sz="1200" b="1">
+                        <a:rPr sz="1200" b="1" dirty="0">
                           <a:solidFill>
                             <a:srgbClr val="FFFFFF"/>
                           </a:solidFill>
@@ -7907,7 +7686,7 @@
                       </a:r>
                     </a:p>
                   </a:txBody>
-                  <a:tcPr>
+                  <a:tcPr anchor="ctr">
                     <a:solidFill>
                       <a:srgbClr val="0A1F6B"/>
                     </a:solidFill>
@@ -7919,7 +7698,7 @@
                     <a:lstStyle/>
                     <a:p>
                       <a:r>
-                        <a:rPr sz="1200" b="1">
+                        <a:rPr sz="1200" b="1" dirty="0">
                           <a:solidFill>
                             <a:srgbClr val="FFFFFF"/>
                           </a:solidFill>
@@ -7929,7 +7708,7 @@
                       </a:r>
                     </a:p>
                   </a:txBody>
-                  <a:tcPr>
+                  <a:tcPr anchor="ctr">
                     <a:solidFill>
                       <a:srgbClr val="0A1F6B"/>
                     </a:solidFill>
@@ -7941,7 +7720,7 @@
                     <a:lstStyle/>
                     <a:p>
                       <a:r>
-                        <a:rPr sz="1200" b="1">
+                        <a:rPr sz="1200" b="1" dirty="0">
                           <a:solidFill>
                             <a:srgbClr val="FFFFFF"/>
                           </a:solidFill>
@@ -7951,12 +7730,17 @@
                       </a:r>
                     </a:p>
                   </a:txBody>
-                  <a:tcPr>
+                  <a:tcPr anchor="ctr">
                     <a:solidFill>
                       <a:srgbClr val="0A1F6B"/>
                     </a:solidFill>
                   </a:tcPr>
                 </a:tc>
+                <a:extLst>
+                  <a:ext uri="{0D108BD9-81ED-4DB2-BD59-A6C34878D82A}">
+                    <a16:rowId xmlns:a16="http://schemas.microsoft.com/office/drawing/2014/main" val="10000"/>
+                  </a:ext>
+                </a:extLst>
               </a:tr>
               <a:tr h="868680">
                 <a:tc>
@@ -8031,7 +7815,7 @@
                     <a:lstStyle/>
                     <a:p>
                       <a:r>
-                        <a:rPr sz="1200">
+                        <a:rPr sz="1200" dirty="0">
                           <a:solidFill>
                             <a:srgbClr val="1A1A2E"/>
                           </a:solidFill>
@@ -8047,6 +7831,11 @@
                     </a:solidFill>
                   </a:tcPr>
                 </a:tc>
+                <a:extLst>
+                  <a:ext uri="{0D108BD9-81ED-4DB2-BD59-A6C34878D82A}">
+                    <a16:rowId xmlns:a16="http://schemas.microsoft.com/office/drawing/2014/main" val="10001"/>
+                  </a:ext>
+                </a:extLst>
               </a:tr>
             </a:tbl>
           </a:graphicData>
@@ -8093,75 +7882,7 @@
           <a:lstStyle/>
           <a:p>
             <a:pPr algn="ctr"/>
-          </a:p>
-        </p:txBody>
-      </p:sp>
-      <p:sp>
-        <p:nvSpPr>
-          <p:cNvPr id="10" name="TextBox 9"/>
-          <p:cNvSpPr txBox="1"/>
-          <p:nvPr/>
-        </p:nvSpPr>
-        <p:spPr>
-          <a:xfrm>
-            <a:off x="502920" y="6519672"/>
-            <a:ext cx="11155680" cy="310896"/>
-          </a:xfrm>
-          <a:prstGeom prst="rect">
-            <a:avLst/>
-          </a:prstGeom>
-          <a:noFill/>
-        </p:spPr>
-        <p:txBody>
-          <a:bodyPr wrap="square" anchor="ctr">
-            <a:spAutoFit/>
-          </a:bodyPr>
-          <a:lstStyle/>
-          <a:p>
-            <a:pPr algn="l">
-              <a:lnSpc>
-                <a:spcPct val="105000"/>
-              </a:lnSpc>
-              <a:spcAft>
-                <a:spcPts val="600"/>
-              </a:spcAft>
-            </a:pPr>
-            <a:r>
-              <a:rPr sz="1100" b="1">
-                <a:solidFill>
-                  <a:srgbClr val="0A1F6B"/>
-                </a:solidFill>
-                <a:latin typeface="Calibri"/>
-              </a:rPr>
-              <a:t>Rubric: </a:t>
-            </a:r>
-            <a:r>
-              <a:rPr sz="1100" b="0">
-                <a:solidFill>
-                  <a:srgbClr val="555555"/>
-                </a:solidFill>
-                <a:latin typeface="Calibri"/>
-              </a:rPr>
-              <a:t>Problem Framing (15 pts) + Architecture (10 pts)</a:t>
-            </a:r>
-            <a:r>
-              <a:rPr sz="1100" b="1">
-                <a:solidFill>
-                  <a:srgbClr val="0A1F6B"/>
-                </a:solidFill>
-                <a:latin typeface="Calibri"/>
-              </a:rPr>
-              <a:t>     |     Handout / docs: </a:t>
-            </a:r>
-            <a:r>
-              <a:rPr sz="1100" b="0">
-                <a:solidFill>
-                  <a:srgbClr val="555555"/>
-                </a:solidFill>
-                <a:latin typeface="Calibri"/>
-              </a:rPr>
-              <a:t>Handout 2 | docs/02-03</a:t>
-            </a:r>
+            <a:endParaRPr/>
           </a:p>
         </p:txBody>
       </p:sp>
@@ -8174,7 +7895,7 @@
 </file>
 
 <file path=ppt/slides/slide4.xml><?xml version="1.0" encoding="utf-8"?>
-<p:sld xmlns:a="http://schemas.openxmlformats.org/drawingml/2006/main" xmlns:p="http://schemas.openxmlformats.org/presentationml/2006/main" xmlns:r="http://schemas.openxmlformats.org/officeDocument/2006/relationships">
+<p:sld xmlns:a="http://schemas.openxmlformats.org/drawingml/2006/main" xmlns:r="http://schemas.openxmlformats.org/officeDocument/2006/relationships" xmlns:p="http://schemas.openxmlformats.org/presentationml/2006/main">
   <p:cSld>
     <p:spTree>
       <p:nvGrpSpPr>
@@ -8182,7 +7903,14 @@
         <p:cNvGrpSpPr/>
         <p:nvPr/>
       </p:nvGrpSpPr>
-      <p:grpSpPr/>
+      <p:grpSpPr>
+        <a:xfrm>
+          <a:off x="0" y="0"/>
+          <a:ext cx="0" cy="0"/>
+          <a:chOff x="0" y="0"/>
+          <a:chExt cx="0" cy="0"/>
+        </a:xfrm>
+      </p:grpSpPr>
       <p:sp>
         <p:nvSpPr>
           <p:cNvPr id="2" name="Rectangle 1"/>
@@ -8224,6 +7952,7 @@
           <a:lstStyle/>
           <a:p>
             <a:pPr algn="ctr"/>
+            <a:endParaRPr/>
           </a:p>
         </p:txBody>
       </p:sp>
@@ -8352,6 +8081,7 @@
           <a:lstStyle/>
           <a:p>
             <a:pPr algn="ctr"/>
+            <a:endParaRPr/>
           </a:p>
         </p:txBody>
       </p:sp>
@@ -8396,6 +8126,7 @@
           <a:lstStyle/>
           <a:p>
             <a:pPr algn="ctr"/>
+            <a:endParaRPr/>
           </a:p>
         </p:txBody>
       </p:sp>
@@ -8501,6 +8232,7 @@
           <a:lstStyle/>
           <a:p>
             <a:pPr algn="ctr"/>
+            <a:endParaRPr/>
           </a:p>
         </p:txBody>
       </p:sp>
@@ -8574,7 +8306,7 @@
         <p:spPr>
           <a:xfrm>
             <a:off x="3154680" y="2331720"/>
-            <a:ext cx="8458200" cy="274320"/>
+            <a:ext cx="8458200" cy="262892"/>
           </a:xfrm>
           <a:prstGeom prst="rect">
             <a:avLst/>
@@ -8596,13 +8328,13 @@
               </a:spcAft>
             </a:pPr>
             <a:r>
-              <a:rPr sz="1100" b="1">
+              <a:rPr sz="1100" b="1" dirty="0">
                 <a:solidFill>
                   <a:srgbClr val="0E7C86"/>
                 </a:solidFill>
                 <a:latin typeface="Calibri"/>
               </a:rPr>
-              <a:t>A2A shared context (Blackboard)</a:t>
+              <a:t>A2A shared context</a:t>
             </a:r>
           </a:p>
         </p:txBody>
@@ -8648,6 +8380,7 @@
           <a:lstStyle/>
           <a:p>
             <a:pPr algn="ctr"/>
+            <a:endParaRPr/>
           </a:p>
         </p:txBody>
       </p:sp>
@@ -8753,6 +8486,7 @@
           <a:lstStyle/>
           <a:p>
             <a:pPr algn="ctr"/>
+            <a:endParaRPr/>
           </a:p>
         </p:txBody>
       </p:sp>
@@ -8858,6 +8592,7 @@
           <a:lstStyle/>
           <a:p>
             <a:pPr algn="ctr"/>
+            <a:endParaRPr/>
           </a:p>
         </p:txBody>
       </p:sp>
@@ -8963,6 +8698,7 @@
           <a:lstStyle/>
           <a:p>
             <a:pPr algn="ctr"/>
+            <a:endParaRPr/>
           </a:p>
         </p:txBody>
       </p:sp>
@@ -9068,6 +8804,7 @@
           <a:lstStyle/>
           <a:p>
             <a:pPr algn="ctr"/>
+            <a:endParaRPr/>
           </a:p>
         </p:txBody>
       </p:sp>
@@ -9436,6 +9173,7 @@
           <a:lstStyle/>
           <a:p>
             <a:pPr algn="ctr"/>
+            <a:endParaRPr/>
           </a:p>
         </p:txBody>
       </p:sp>
@@ -9522,75 +9260,7 @@
           <a:lstStyle/>
           <a:p>
             <a:pPr algn="ctr"/>
-          </a:p>
-        </p:txBody>
-      </p:sp>
-      <p:sp>
-        <p:nvSpPr>
-          <p:cNvPr id="28" name="TextBox 27"/>
-          <p:cNvSpPr txBox="1"/>
-          <p:nvPr/>
-        </p:nvSpPr>
-        <p:spPr>
-          <a:xfrm>
-            <a:off x="502920" y="6519672"/>
-            <a:ext cx="11155680" cy="310896"/>
-          </a:xfrm>
-          <a:prstGeom prst="rect">
-            <a:avLst/>
-          </a:prstGeom>
-          <a:noFill/>
-        </p:spPr>
-        <p:txBody>
-          <a:bodyPr wrap="square" anchor="ctr">
-            <a:spAutoFit/>
-          </a:bodyPr>
-          <a:lstStyle/>
-          <a:p>
-            <a:pPr algn="l">
-              <a:lnSpc>
-                <a:spcPct val="105000"/>
-              </a:lnSpc>
-              <a:spcAft>
-                <a:spcPts val="600"/>
-              </a:spcAft>
-            </a:pPr>
-            <a:r>
-              <a:rPr sz="1100" b="1">
-                <a:solidFill>
-                  <a:srgbClr val="0A1F6B"/>
-                </a:solidFill>
-                <a:latin typeface="Calibri"/>
-              </a:rPr>
-              <a:t>Rubric: </a:t>
-            </a:r>
-            <a:r>
-              <a:rPr sz="1100" b="0">
-                <a:solidFill>
-                  <a:srgbClr val="555555"/>
-                </a:solidFill>
-                <a:latin typeface="Calibri"/>
-              </a:rPr>
-              <a:t>Agentic System Architecture (10 pts)</a:t>
-            </a:r>
-            <a:r>
-              <a:rPr sz="1100" b="1">
-                <a:solidFill>
-                  <a:srgbClr val="0A1F6B"/>
-                </a:solidFill>
-                <a:latin typeface="Calibri"/>
-              </a:rPr>
-              <a:t>     |     Handout / docs: </a:t>
-            </a:r>
-            <a:r>
-              <a:rPr sz="1100" b="0">
-                <a:solidFill>
-                  <a:srgbClr val="555555"/>
-                </a:solidFill>
-                <a:latin typeface="Calibri"/>
-              </a:rPr>
-              <a:t>Handout 5 | docs/03</a:t>
-            </a:r>
+            <a:endParaRPr/>
           </a:p>
         </p:txBody>
       </p:sp>
@@ -9603,7 +9273,7 @@
 </file>
 
 <file path=ppt/slides/slide5.xml><?xml version="1.0" encoding="utf-8"?>
-<p:sld xmlns:a="http://schemas.openxmlformats.org/drawingml/2006/main" xmlns:p="http://schemas.openxmlformats.org/presentationml/2006/main" xmlns:r="http://schemas.openxmlformats.org/officeDocument/2006/relationships">
+<p:sld xmlns:a="http://schemas.openxmlformats.org/drawingml/2006/main" xmlns:r="http://schemas.openxmlformats.org/officeDocument/2006/relationships" xmlns:p="http://schemas.openxmlformats.org/presentationml/2006/main">
   <p:cSld>
     <p:spTree>
       <p:nvGrpSpPr>
@@ -9611,7 +9281,14 @@
         <p:cNvGrpSpPr/>
         <p:nvPr/>
       </p:nvGrpSpPr>
-      <p:grpSpPr/>
+      <p:grpSpPr>
+        <a:xfrm>
+          <a:off x="0" y="0"/>
+          <a:ext cx="0" cy="0"/>
+          <a:chOff x="0" y="0"/>
+          <a:chExt cx="0" cy="0"/>
+        </a:xfrm>
+      </p:grpSpPr>
       <p:sp>
         <p:nvSpPr>
           <p:cNvPr id="2" name="Rectangle 1"/>
@@ -9653,6 +9330,7 @@
           <a:lstStyle/>
           <a:p>
             <a:pPr algn="ctr"/>
+            <a:endParaRPr/>
           </a:p>
         </p:txBody>
       </p:sp>
@@ -9781,6 +9459,7 @@
           <a:lstStyle/>
           <a:p>
             <a:pPr algn="ctr"/>
+            <a:endParaRPr/>
           </a:p>
         </p:txBody>
       </p:sp>
@@ -9790,7 +9469,13 @@
           <p:cNvGraphicFramePr>
             <a:graphicFrameLocks noGrp="1"/>
           </p:cNvGraphicFramePr>
-          <p:nvPr/>
+          <p:nvPr>
+            <p:extLst>
+              <p:ext uri="{D42A27DB-BD31-4B8C-83A1-F6EECF244321}">
+                <p14:modId xmlns:p14="http://schemas.microsoft.com/office/powerpoint/2010/main" val="2009326480"/>
+              </p:ext>
+            </p:extLst>
+          </p:nvPr>
         </p:nvGraphicFramePr>
         <p:xfrm>
           <a:off x="548640" y="1463040"/>
@@ -9803,9 +9488,27 @@
                 <a:tableStyleId>{5C22544A-7EE6-4342-B048-85BDC9FD1C3A}</a:tableStyleId>
               </a:tblPr>
               <a:tblGrid>
-                <a:gridCol w="3017520"/>
-                <a:gridCol w="1463040"/>
-                <a:gridCol w="6583680"/>
+                <a:gridCol w="3017520">
+                  <a:extLst>
+                    <a:ext uri="{9D8B030D-6E8A-4147-A177-3AD203B41FA5}">
+                      <a16:colId xmlns:a16="http://schemas.microsoft.com/office/drawing/2014/main" val="20000"/>
+                    </a:ext>
+                  </a:extLst>
+                </a:gridCol>
+                <a:gridCol w="1463040">
+                  <a:extLst>
+                    <a:ext uri="{9D8B030D-6E8A-4147-A177-3AD203B41FA5}">
+                      <a16:colId xmlns:a16="http://schemas.microsoft.com/office/drawing/2014/main" val="20001"/>
+                    </a:ext>
+                  </a:extLst>
+                </a:gridCol>
+                <a:gridCol w="6583680">
+                  <a:extLst>
+                    <a:ext uri="{9D8B030D-6E8A-4147-A177-3AD203B41FA5}">
+                      <a16:colId xmlns:a16="http://schemas.microsoft.com/office/drawing/2014/main" val="20002"/>
+                    </a:ext>
+                  </a:extLst>
+                </a:gridCol>
               </a:tblGrid>
               <a:tr h="658368">
                 <a:tc>
@@ -9858,13 +9561,13 @@
                     <a:lstStyle/>
                     <a:p>
                       <a:r>
-                        <a:rPr sz="1300" b="1">
+                        <a:rPr sz="1300" b="1" dirty="0">
                           <a:solidFill>
                             <a:srgbClr val="FFFFFF"/>
                           </a:solidFill>
                           <a:latin typeface="Calibri"/>
                         </a:rPr>
-                        <a:t>Reason (Session 4)</a:t>
+                        <a:t>Reason</a:t>
                       </a:r>
                     </a:p>
                   </a:txBody>
@@ -9874,6 +9577,11 @@
                     </a:solidFill>
                   </a:tcPr>
                 </a:tc>
+                <a:extLst>
+                  <a:ext uri="{0D108BD9-81ED-4DB2-BD59-A6C34878D82A}">
+                    <a16:rowId xmlns:a16="http://schemas.microsoft.com/office/drawing/2014/main" val="10000"/>
+                  </a:ext>
+                </a:extLst>
               </a:tr>
               <a:tr h="658368">
                 <a:tc>
@@ -9942,6 +9650,11 @@
                     </a:solidFill>
                   </a:tcPr>
                 </a:tc>
+                <a:extLst>
+                  <a:ext uri="{0D108BD9-81ED-4DB2-BD59-A6C34878D82A}">
+                    <a16:rowId xmlns:a16="http://schemas.microsoft.com/office/drawing/2014/main" val="10001"/>
+                  </a:ext>
+                </a:extLst>
               </a:tr>
               <a:tr h="658368">
                 <a:tc>
@@ -10010,6 +9723,11 @@
                     </a:solidFill>
                   </a:tcPr>
                 </a:tc>
+                <a:extLst>
+                  <a:ext uri="{0D108BD9-81ED-4DB2-BD59-A6C34878D82A}">
+                    <a16:rowId xmlns:a16="http://schemas.microsoft.com/office/drawing/2014/main" val="10002"/>
+                  </a:ext>
+                </a:extLst>
               </a:tr>
               <a:tr h="658368">
                 <a:tc>
@@ -10078,6 +9796,11 @@
                     </a:solidFill>
                   </a:tcPr>
                 </a:tc>
+                <a:extLst>
+                  <a:ext uri="{0D108BD9-81ED-4DB2-BD59-A6C34878D82A}">
+                    <a16:rowId xmlns:a16="http://schemas.microsoft.com/office/drawing/2014/main" val="10003"/>
+                  </a:ext>
+                </a:extLst>
               </a:tr>
               <a:tr h="658368">
                 <a:tc>
@@ -10130,7 +9853,7 @@
                     <a:lstStyle/>
                     <a:p>
                       <a:r>
-                        <a:rPr sz="1300">
+                        <a:rPr sz="1300" dirty="0">
                           <a:solidFill>
                             <a:srgbClr val="1A1A2E"/>
                           </a:solidFill>
@@ -10146,6 +9869,11 @@
                     </a:solidFill>
                   </a:tcPr>
                 </a:tc>
+                <a:extLst>
+                  <a:ext uri="{0D108BD9-81ED-4DB2-BD59-A6C34878D82A}">
+                    <a16:rowId xmlns:a16="http://schemas.microsoft.com/office/drawing/2014/main" val="10004"/>
+                  </a:ext>
+                </a:extLst>
               </a:tr>
             </a:tbl>
           </a:graphicData>
@@ -10192,6 +9920,7 @@
           <a:lstStyle/>
           <a:p>
             <a:pPr algn="ctr"/>
+            <a:endParaRPr/>
           </a:p>
         </p:txBody>
       </p:sp>
@@ -10287,75 +10016,7 @@
           <a:lstStyle/>
           <a:p>
             <a:pPr algn="ctr"/>
-          </a:p>
-        </p:txBody>
-      </p:sp>
-      <p:sp>
-        <p:nvSpPr>
-          <p:cNvPr id="10" name="TextBox 9"/>
-          <p:cNvSpPr txBox="1"/>
-          <p:nvPr/>
-        </p:nvSpPr>
-        <p:spPr>
-          <a:xfrm>
-            <a:off x="502920" y="6519672"/>
-            <a:ext cx="11155680" cy="310896"/>
-          </a:xfrm>
-          <a:prstGeom prst="rect">
-            <a:avLst/>
-          </a:prstGeom>
-          <a:noFill/>
-        </p:spPr>
-        <p:txBody>
-          <a:bodyPr wrap="square" anchor="ctr">
-            <a:spAutoFit/>
-          </a:bodyPr>
-          <a:lstStyle/>
-          <a:p>
-            <a:pPr algn="l">
-              <a:lnSpc>
-                <a:spcPct val="105000"/>
-              </a:lnSpc>
-              <a:spcAft>
-                <a:spcPts val="600"/>
-              </a:spcAft>
-            </a:pPr>
-            <a:r>
-              <a:rPr sz="1100" b="1">
-                <a:solidFill>
-                  <a:srgbClr val="0A1F6B"/>
-                </a:solidFill>
-                <a:latin typeface="Calibri"/>
-              </a:rPr>
-              <a:t>Rubric: </a:t>
-            </a:r>
-            <a:r>
-              <a:rPr sz="1100" b="0">
-                <a:solidFill>
-                  <a:srgbClr val="555555"/>
-                </a:solidFill>
-                <a:latin typeface="Calibri"/>
-              </a:rPr>
-              <a:t>Agentic System Architecture (10 pts)</a:t>
-            </a:r>
-            <a:r>
-              <a:rPr sz="1100" b="1">
-                <a:solidFill>
-                  <a:srgbClr val="0A1F6B"/>
-                </a:solidFill>
-                <a:latin typeface="Calibri"/>
-              </a:rPr>
-              <a:t>     |     Handout / docs: </a:t>
-            </a:r>
-            <a:r>
-              <a:rPr sz="1100" b="0">
-                <a:solidFill>
-                  <a:srgbClr val="555555"/>
-                </a:solidFill>
-                <a:latin typeface="Calibri"/>
-              </a:rPr>
-              <a:t>Handout 5 | docs/03</a:t>
-            </a:r>
+            <a:endParaRPr/>
           </a:p>
         </p:txBody>
       </p:sp>
@@ -10368,7 +10029,7 @@
 </file>
 
 <file path=ppt/slides/slide6.xml><?xml version="1.0" encoding="utf-8"?>
-<p:sld xmlns:a="http://schemas.openxmlformats.org/drawingml/2006/main" xmlns:p="http://schemas.openxmlformats.org/presentationml/2006/main" xmlns:r="http://schemas.openxmlformats.org/officeDocument/2006/relationships">
+<p:sld xmlns:a="http://schemas.openxmlformats.org/drawingml/2006/main" xmlns:r="http://schemas.openxmlformats.org/officeDocument/2006/relationships" xmlns:p="http://schemas.openxmlformats.org/presentationml/2006/main">
   <p:cSld>
     <p:spTree>
       <p:nvGrpSpPr>
@@ -10376,7 +10037,14 @@
         <p:cNvGrpSpPr/>
         <p:nvPr/>
       </p:nvGrpSpPr>
-      <p:grpSpPr/>
+      <p:grpSpPr>
+        <a:xfrm>
+          <a:off x="0" y="0"/>
+          <a:ext cx="0" cy="0"/>
+          <a:chOff x="0" y="0"/>
+          <a:chExt cx="0" cy="0"/>
+        </a:xfrm>
+      </p:grpSpPr>
       <p:sp>
         <p:nvSpPr>
           <p:cNvPr id="2" name="Rectangle 1"/>
@@ -10418,6 +10086,7 @@
           <a:lstStyle/>
           <a:p>
             <a:pPr algn="ctr"/>
+            <a:endParaRPr/>
           </a:p>
         </p:txBody>
       </p:sp>
@@ -10546,6 +10215,7 @@
           <a:lstStyle/>
           <a:p>
             <a:pPr algn="ctr"/>
+            <a:endParaRPr/>
           </a:p>
         </p:txBody>
       </p:sp>
@@ -10568,10 +10238,34 @@
                 <a:tableStyleId>{5C22544A-7EE6-4342-B048-85BDC9FD1C3A}</a:tableStyleId>
               </a:tblPr>
               <a:tblGrid>
-                <a:gridCol w="2651760"/>
-                <a:gridCol w="1097280"/>
-                <a:gridCol w="1828800"/>
-                <a:gridCol w="5486400"/>
+                <a:gridCol w="2651760">
+                  <a:extLst>
+                    <a:ext uri="{9D8B030D-6E8A-4147-A177-3AD203B41FA5}">
+                      <a16:colId xmlns:a16="http://schemas.microsoft.com/office/drawing/2014/main" val="20000"/>
+                    </a:ext>
+                  </a:extLst>
+                </a:gridCol>
+                <a:gridCol w="1097280">
+                  <a:extLst>
+                    <a:ext uri="{9D8B030D-6E8A-4147-A177-3AD203B41FA5}">
+                      <a16:colId xmlns:a16="http://schemas.microsoft.com/office/drawing/2014/main" val="20001"/>
+                    </a:ext>
+                  </a:extLst>
+                </a:gridCol>
+                <a:gridCol w="1828800">
+                  <a:extLst>
+                    <a:ext uri="{9D8B030D-6E8A-4147-A177-3AD203B41FA5}">
+                      <a16:colId xmlns:a16="http://schemas.microsoft.com/office/drawing/2014/main" val="20002"/>
+                    </a:ext>
+                  </a:extLst>
+                </a:gridCol>
+                <a:gridCol w="5486400">
+                  <a:extLst>
+                    <a:ext uri="{9D8B030D-6E8A-4147-A177-3AD203B41FA5}">
+                      <a16:colId xmlns:a16="http://schemas.microsoft.com/office/drawing/2014/main" val="20003"/>
+                    </a:ext>
+                  </a:extLst>
+                </a:gridCol>
               </a:tblGrid>
               <a:tr h="384048">
                 <a:tc>
@@ -10662,6 +10356,11 @@
                     </a:solidFill>
                   </a:tcPr>
                 </a:tc>
+                <a:extLst>
+                  <a:ext uri="{0D108BD9-81ED-4DB2-BD59-A6C34878D82A}">
+                    <a16:rowId xmlns:a16="http://schemas.microsoft.com/office/drawing/2014/main" val="10000"/>
+                  </a:ext>
+                </a:extLst>
               </a:tr>
               <a:tr h="384048">
                 <a:tc>
@@ -10752,6 +10451,11 @@
                     </a:solidFill>
                   </a:tcPr>
                 </a:tc>
+                <a:extLst>
+                  <a:ext uri="{0D108BD9-81ED-4DB2-BD59-A6C34878D82A}">
+                    <a16:rowId xmlns:a16="http://schemas.microsoft.com/office/drawing/2014/main" val="10001"/>
+                  </a:ext>
+                </a:extLst>
               </a:tr>
               <a:tr h="384048">
                 <a:tc>
@@ -10842,6 +10546,11 @@
                     </a:solidFill>
                   </a:tcPr>
                 </a:tc>
+                <a:extLst>
+                  <a:ext uri="{0D108BD9-81ED-4DB2-BD59-A6C34878D82A}">
+                    <a16:rowId xmlns:a16="http://schemas.microsoft.com/office/drawing/2014/main" val="10002"/>
+                  </a:ext>
+                </a:extLst>
               </a:tr>
               <a:tr h="384048">
                 <a:tc>
@@ -10932,6 +10641,11 @@
                     </a:solidFill>
                   </a:tcPr>
                 </a:tc>
+                <a:extLst>
+                  <a:ext uri="{0D108BD9-81ED-4DB2-BD59-A6C34878D82A}">
+                    <a16:rowId xmlns:a16="http://schemas.microsoft.com/office/drawing/2014/main" val="10003"/>
+                  </a:ext>
+                </a:extLst>
               </a:tr>
               <a:tr h="384048">
                 <a:tc>
@@ -11022,6 +10736,11 @@
                     </a:solidFill>
                   </a:tcPr>
                 </a:tc>
+                <a:extLst>
+                  <a:ext uri="{0D108BD9-81ED-4DB2-BD59-A6C34878D82A}">
+                    <a16:rowId xmlns:a16="http://schemas.microsoft.com/office/drawing/2014/main" val="10004"/>
+                  </a:ext>
+                </a:extLst>
               </a:tr>
               <a:tr h="384048">
                 <a:tc>
@@ -11112,6 +10831,11 @@
                     </a:solidFill>
                   </a:tcPr>
                 </a:tc>
+                <a:extLst>
+                  <a:ext uri="{0D108BD9-81ED-4DB2-BD59-A6C34878D82A}">
+                    <a16:rowId xmlns:a16="http://schemas.microsoft.com/office/drawing/2014/main" val="10005"/>
+                  </a:ext>
+                </a:extLst>
               </a:tr>
               <a:tr h="384048">
                 <a:tc>
@@ -11202,6 +10926,11 @@
                     </a:solidFill>
                   </a:tcPr>
                 </a:tc>
+                <a:extLst>
+                  <a:ext uri="{0D108BD9-81ED-4DB2-BD59-A6C34878D82A}">
+                    <a16:rowId xmlns:a16="http://schemas.microsoft.com/office/drawing/2014/main" val="10006"/>
+                  </a:ext>
+                </a:extLst>
               </a:tr>
               <a:tr h="384048">
                 <a:tc>
@@ -11292,6 +11021,11 @@
                     </a:solidFill>
                   </a:tcPr>
                 </a:tc>
+                <a:extLst>
+                  <a:ext uri="{0D108BD9-81ED-4DB2-BD59-A6C34878D82A}">
+                    <a16:rowId xmlns:a16="http://schemas.microsoft.com/office/drawing/2014/main" val="10007"/>
+                  </a:ext>
+                </a:extLst>
               </a:tr>
               <a:tr h="384048">
                 <a:tc>
@@ -11382,6 +11116,11 @@
                     </a:solidFill>
                   </a:tcPr>
                 </a:tc>
+                <a:extLst>
+                  <a:ext uri="{0D108BD9-81ED-4DB2-BD59-A6C34878D82A}">
+                    <a16:rowId xmlns:a16="http://schemas.microsoft.com/office/drawing/2014/main" val="10008"/>
+                  </a:ext>
+                </a:extLst>
               </a:tr>
               <a:tr h="384048">
                 <a:tc>
@@ -11472,6 +11211,11 @@
                     </a:solidFill>
                   </a:tcPr>
                 </a:tc>
+                <a:extLst>
+                  <a:ext uri="{0D108BD9-81ED-4DB2-BD59-A6C34878D82A}">
+                    <a16:rowId xmlns:a16="http://schemas.microsoft.com/office/drawing/2014/main" val="10009"/>
+                  </a:ext>
+                </a:extLst>
               </a:tr>
               <a:tr h="384048">
                 <a:tc>
@@ -11562,6 +11306,11 @@
                     </a:solidFill>
                   </a:tcPr>
                 </a:tc>
+                <a:extLst>
+                  <a:ext uri="{0D108BD9-81ED-4DB2-BD59-A6C34878D82A}">
+                    <a16:rowId xmlns:a16="http://schemas.microsoft.com/office/drawing/2014/main" val="10010"/>
+                  </a:ext>
+                </a:extLst>
               </a:tr>
             </a:tbl>
           </a:graphicData>
@@ -11608,75 +11357,7 @@
           <a:lstStyle/>
           <a:p>
             <a:pPr algn="ctr"/>
-          </a:p>
-        </p:txBody>
-      </p:sp>
-      <p:sp>
-        <p:nvSpPr>
-          <p:cNvPr id="8" name="TextBox 7"/>
-          <p:cNvSpPr txBox="1"/>
-          <p:nvPr/>
-        </p:nvSpPr>
-        <p:spPr>
-          <a:xfrm>
-            <a:off x="502920" y="6519672"/>
-            <a:ext cx="11155680" cy="310896"/>
-          </a:xfrm>
-          <a:prstGeom prst="rect">
-            <a:avLst/>
-          </a:prstGeom>
-          <a:noFill/>
-        </p:spPr>
-        <p:txBody>
-          <a:bodyPr wrap="square" anchor="ctr">
-            <a:spAutoFit/>
-          </a:bodyPr>
-          <a:lstStyle/>
-          <a:p>
-            <a:pPr algn="l">
-              <a:lnSpc>
-                <a:spcPct val="105000"/>
-              </a:lnSpc>
-              <a:spcAft>
-                <a:spcPts val="600"/>
-              </a:spcAft>
-            </a:pPr>
-            <a:r>
-              <a:rPr sz="1100" b="1">
-                <a:solidFill>
-                  <a:srgbClr val="0A1F6B"/>
-                </a:solidFill>
-                <a:latin typeface="Calibri"/>
-              </a:rPr>
-              <a:t>Rubric: </a:t>
-            </a:r>
-            <a:r>
-              <a:rPr sz="1100" b="0">
-                <a:solidFill>
-                  <a:srgbClr val="555555"/>
-                </a:solidFill>
-                <a:latin typeface="Calibri"/>
-              </a:rPr>
-              <a:t>Tools, Actions &amp; Feasibility (15 pts)</a:t>
-            </a:r>
-            <a:r>
-              <a:rPr sz="1100" b="1">
-                <a:solidFill>
-                  <a:srgbClr val="0A1F6B"/>
-                </a:solidFill>
-                <a:latin typeface="Calibri"/>
-              </a:rPr>
-              <a:t>     |     Handout / docs: </a:t>
-            </a:r>
-            <a:r>
-              <a:rPr sz="1100" b="0">
-                <a:solidFill>
-                  <a:srgbClr val="555555"/>
-                </a:solidFill>
-                <a:latin typeface="Calibri"/>
-              </a:rPr>
-              <a:t>Handout 3 | docs/02-04</a:t>
-            </a:r>
+            <a:endParaRPr/>
           </a:p>
         </p:txBody>
       </p:sp>
@@ -11689,7 +11370,7 @@
 </file>
 
 <file path=ppt/slides/slide7.xml><?xml version="1.0" encoding="utf-8"?>
-<p:sld xmlns:a="http://schemas.openxmlformats.org/drawingml/2006/main" xmlns:p="http://schemas.openxmlformats.org/presentationml/2006/main" xmlns:r="http://schemas.openxmlformats.org/officeDocument/2006/relationships">
+<p:sld xmlns:a="http://schemas.openxmlformats.org/drawingml/2006/main" xmlns:r="http://schemas.openxmlformats.org/officeDocument/2006/relationships" xmlns:p="http://schemas.openxmlformats.org/presentationml/2006/main">
   <p:cSld>
     <p:spTree>
       <p:nvGrpSpPr>
@@ -11697,7 +11378,14 @@
         <p:cNvGrpSpPr/>
         <p:nvPr/>
       </p:nvGrpSpPr>
-      <p:grpSpPr/>
+      <p:grpSpPr>
+        <a:xfrm>
+          <a:off x="0" y="0"/>
+          <a:ext cx="0" cy="0"/>
+          <a:chOff x="0" y="0"/>
+          <a:chExt cx="0" cy="0"/>
+        </a:xfrm>
+      </p:grpSpPr>
       <p:sp>
         <p:nvSpPr>
           <p:cNvPr id="2" name="Rectangle 1"/>
@@ -11739,6 +11427,7 @@
           <a:lstStyle/>
           <a:p>
             <a:pPr algn="ctr"/>
+            <a:endParaRPr/>
           </a:p>
         </p:txBody>
       </p:sp>
@@ -11867,6 +11556,7 @@
           <a:lstStyle/>
           <a:p>
             <a:pPr algn="ctr"/>
+            <a:endParaRPr/>
           </a:p>
         </p:txBody>
       </p:sp>
@@ -11911,6 +11601,7 @@
           <a:lstStyle/>
           <a:p>
             <a:pPr algn="ctr"/>
+            <a:endParaRPr/>
           </a:p>
         </p:txBody>
       </p:sp>
@@ -12039,6 +11730,7 @@
           <a:lstStyle/>
           <a:p>
             <a:pPr algn="ctr"/>
+            <a:endParaRPr/>
           </a:p>
         </p:txBody>
       </p:sp>
@@ -12167,6 +11859,7 @@
           <a:lstStyle/>
           <a:p>
             <a:pPr algn="ctr"/>
+            <a:endParaRPr/>
           </a:p>
         </p:txBody>
       </p:sp>
@@ -12295,6 +11988,7 @@
           <a:lstStyle/>
           <a:p>
             <a:pPr algn="ctr"/>
+            <a:endParaRPr/>
           </a:p>
         </p:txBody>
       </p:sp>
@@ -12423,6 +12117,7 @@
           <a:lstStyle/>
           <a:p>
             <a:pPr algn="ctr"/>
+            <a:endParaRPr/>
           </a:p>
         </p:txBody>
       </p:sp>
@@ -12509,75 +12204,7 @@
           <a:lstStyle/>
           <a:p>
             <a:pPr algn="ctr"/>
-          </a:p>
-        </p:txBody>
-      </p:sp>
-      <p:sp>
-        <p:nvSpPr>
-          <p:cNvPr id="21" name="TextBox 20"/>
-          <p:cNvSpPr txBox="1"/>
-          <p:nvPr/>
-        </p:nvSpPr>
-        <p:spPr>
-          <a:xfrm>
-            <a:off x="502920" y="6519672"/>
-            <a:ext cx="11155680" cy="310896"/>
-          </a:xfrm>
-          <a:prstGeom prst="rect">
-            <a:avLst/>
-          </a:prstGeom>
-          <a:noFill/>
-        </p:spPr>
-        <p:txBody>
-          <a:bodyPr wrap="square" anchor="ctr">
-            <a:spAutoFit/>
-          </a:bodyPr>
-          <a:lstStyle/>
-          <a:p>
-            <a:pPr algn="l">
-              <a:lnSpc>
-                <a:spcPct val="105000"/>
-              </a:lnSpc>
-              <a:spcAft>
-                <a:spcPts val="600"/>
-              </a:spcAft>
-            </a:pPr>
-            <a:r>
-              <a:rPr sz="1100" b="1">
-                <a:solidFill>
-                  <a:srgbClr val="0A1F6B"/>
-                </a:solidFill>
-                <a:latin typeface="Calibri"/>
-              </a:rPr>
-              <a:t>Rubric: </a:t>
-            </a:r>
-            <a:r>
-              <a:rPr sz="1100" b="0">
-                <a:solidFill>
-                  <a:srgbClr val="555555"/>
-                </a:solidFill>
-                <a:latin typeface="Calibri"/>
-              </a:rPr>
-              <a:t>Agentic Thinking and Autonomy (25 pts)</a:t>
-            </a:r>
-            <a:r>
-              <a:rPr sz="1100" b="1">
-                <a:solidFill>
-                  <a:srgbClr val="0A1F6B"/>
-                </a:solidFill>
-                <a:latin typeface="Calibri"/>
-              </a:rPr>
-              <a:t>     |     Handout / docs: </a:t>
-            </a:r>
-            <a:r>
-              <a:rPr sz="1100" b="0">
-                <a:solidFill>
-                  <a:srgbClr val="555555"/>
-                </a:solidFill>
-                <a:latin typeface="Calibri"/>
-              </a:rPr>
-              <a:t>Handout 4 | docs/02 sec 4</a:t>
-            </a:r>
+            <a:endParaRPr/>
           </a:p>
         </p:txBody>
       </p:sp>
@@ -12590,7 +12217,7 @@
 </file>
 
 <file path=ppt/slides/slide8.xml><?xml version="1.0" encoding="utf-8"?>
-<p:sld xmlns:a="http://schemas.openxmlformats.org/drawingml/2006/main" xmlns:p="http://schemas.openxmlformats.org/presentationml/2006/main" xmlns:r="http://schemas.openxmlformats.org/officeDocument/2006/relationships">
+<p:sld xmlns:a="http://schemas.openxmlformats.org/drawingml/2006/main" xmlns:r="http://schemas.openxmlformats.org/officeDocument/2006/relationships" xmlns:p="http://schemas.openxmlformats.org/presentationml/2006/main">
   <p:cSld>
     <p:spTree>
       <p:nvGrpSpPr>
@@ -12598,7 +12225,14 @@
         <p:cNvGrpSpPr/>
         <p:nvPr/>
       </p:nvGrpSpPr>
-      <p:grpSpPr/>
+      <p:grpSpPr>
+        <a:xfrm>
+          <a:off x="0" y="0"/>
+          <a:ext cx="0" cy="0"/>
+          <a:chOff x="0" y="0"/>
+          <a:chExt cx="0" cy="0"/>
+        </a:xfrm>
+      </p:grpSpPr>
       <p:sp>
         <p:nvSpPr>
           <p:cNvPr id="2" name="Rectangle 1"/>
@@ -12640,6 +12274,7 @@
           <a:lstStyle/>
           <a:p>
             <a:pPr algn="ctr"/>
+            <a:endParaRPr/>
           </a:p>
         </p:txBody>
       </p:sp>
@@ -12768,6 +12403,7 @@
           <a:lstStyle/>
           <a:p>
             <a:pPr algn="ctr"/>
+            <a:endParaRPr/>
           </a:p>
         </p:txBody>
       </p:sp>
@@ -12812,6 +12448,7 @@
           <a:lstStyle/>
           <a:p>
             <a:pPr algn="ctr"/>
+            <a:endParaRPr/>
           </a:p>
         </p:txBody>
       </p:sp>
@@ -12824,7 +12461,7 @@
         <p:spPr>
           <a:xfrm>
             <a:off x="731520" y="1572768"/>
-            <a:ext cx="5029200" cy="365760"/>
+            <a:ext cx="5029200" cy="324897"/>
           </a:xfrm>
           <a:prstGeom prst="rect">
             <a:avLst/>
@@ -12846,13 +12483,13 @@
               </a:spcAft>
             </a:pPr>
             <a:r>
-              <a:rPr sz="1500" b="1">
+              <a:rPr sz="1500" b="1" dirty="0">
                 <a:solidFill>
                   <a:srgbClr val="0E7C86"/>
                 </a:solidFill>
                 <a:latin typeface="Calibri"/>
               </a:rPr>
-              <a:t>Interoperability (Session 4)</a:t>
+              <a:t>Interoperability</a:t>
             </a:r>
           </a:p>
         </p:txBody>
@@ -12995,6 +12632,7 @@
           <a:lstStyle/>
           <a:p>
             <a:pPr algn="ctr"/>
+            <a:endParaRPr/>
           </a:p>
         </p:txBody>
       </p:sp>
@@ -13007,7 +12645,7 @@
         <p:spPr>
           <a:xfrm>
             <a:off x="6400800" y="1572768"/>
-            <a:ext cx="5029200" cy="365760"/>
+            <a:ext cx="5029200" cy="324897"/>
           </a:xfrm>
           <a:prstGeom prst="rect">
             <a:avLst/>
@@ -13029,13 +12667,13 @@
               </a:spcAft>
             </a:pPr>
             <a:r>
-              <a:rPr sz="1500" b="1">
+              <a:rPr sz="1500" b="1" dirty="0">
                 <a:solidFill>
                   <a:srgbClr val="0E7C86"/>
                 </a:solidFill>
                 <a:latin typeface="Calibri"/>
               </a:rPr>
-              <a:t>Observability (Sessions 3-4)</a:t>
+              <a:t>Observability</a:t>
             </a:r>
           </a:p>
         </p:txBody>
@@ -13128,7 +12766,7 @@
         <p:spPr>
           <a:xfrm>
             <a:off x="548640" y="3840480"/>
-            <a:ext cx="11064240" cy="411480"/>
+            <a:ext cx="11064240" cy="324897"/>
           </a:xfrm>
           <a:prstGeom prst="rect">
             <a:avLst/>
@@ -13150,13 +12788,13 @@
               </a:spcAft>
             </a:pPr>
             <a:r>
-              <a:rPr sz="1500" b="1">
+              <a:rPr sz="1500" b="1" dirty="0">
                 <a:solidFill>
                   <a:srgbClr val="0A1F6B"/>
                 </a:solidFill>
                 <a:latin typeface="Calibri"/>
               </a:rPr>
-              <a:t>Build vs MVP mapping (docs/03):</a:t>
+              <a:t>Build vs MVP mapping:</a:t>
             </a:r>
           </a:p>
         </p:txBody>
@@ -13167,7 +12805,13 @@
           <p:cNvGraphicFramePr>
             <a:graphicFrameLocks noGrp="1"/>
           </p:cNvGraphicFramePr>
-          <p:nvPr/>
+          <p:nvPr>
+            <p:extLst>
+              <p:ext uri="{D42A27DB-BD31-4B8C-83A1-F6EECF244321}">
+                <p14:modId xmlns:p14="http://schemas.microsoft.com/office/powerpoint/2010/main" val="2400676470"/>
+              </p:ext>
+            </p:extLst>
+          </p:nvPr>
         </p:nvGraphicFramePr>
         <p:xfrm>
           <a:off x="548640" y="4251960"/>
@@ -13180,8 +12824,20 @@
                 <a:tableStyleId>{5C22544A-7EE6-4342-B048-85BDC9FD1C3A}</a:tableStyleId>
               </a:tblPr>
               <a:tblGrid>
-                <a:gridCol w="5394960"/>
-                <a:gridCol w="5669280"/>
+                <a:gridCol w="5394960">
+                  <a:extLst>
+                    <a:ext uri="{9D8B030D-6E8A-4147-A177-3AD203B41FA5}">
+                      <a16:colId xmlns:a16="http://schemas.microsoft.com/office/drawing/2014/main" val="20000"/>
+                    </a:ext>
+                  </a:extLst>
+                </a:gridCol>
+                <a:gridCol w="5669280">
+                  <a:extLst>
+                    <a:ext uri="{9D8B030D-6E8A-4147-A177-3AD203B41FA5}">
+                      <a16:colId xmlns:a16="http://schemas.microsoft.com/office/drawing/2014/main" val="20001"/>
+                    </a:ext>
+                  </a:extLst>
+                </a:gridCol>
               </a:tblGrid>
               <a:tr h="411480">
                 <a:tc>
@@ -13212,13 +12868,13 @@
                     <a:lstStyle/>
                     <a:p>
                       <a:r>
-                        <a:rPr sz="1250" b="1">
+                        <a:rPr sz="1250" b="1" dirty="0">
                           <a:solidFill>
                             <a:srgbClr val="FFFFFF"/>
                           </a:solidFill>
                           <a:latin typeface="Calibri"/>
                         </a:rPr>
-                        <a:t>MVP stand-in (this repo)</a:t>
+                        <a:t>MVP stand-in</a:t>
                       </a:r>
                     </a:p>
                   </a:txBody>
@@ -13228,6 +12884,11 @@
                     </a:solidFill>
                   </a:tcPr>
                 </a:tc>
+                <a:extLst>
+                  <a:ext uri="{0D108BD9-81ED-4DB2-BD59-A6C34878D82A}">
+                    <a16:rowId xmlns:a16="http://schemas.microsoft.com/office/drawing/2014/main" val="10000"/>
+                  </a:ext>
+                </a:extLst>
               </a:tr>
               <a:tr h="411480">
                 <a:tc>
@@ -13274,6 +12935,11 @@
                     </a:solidFill>
                   </a:tcPr>
                 </a:tc>
+                <a:extLst>
+                  <a:ext uri="{0D108BD9-81ED-4DB2-BD59-A6C34878D82A}">
+                    <a16:rowId xmlns:a16="http://schemas.microsoft.com/office/drawing/2014/main" val="10001"/>
+                  </a:ext>
+                </a:extLst>
               </a:tr>
               <a:tr h="411480">
                 <a:tc>
@@ -13320,6 +12986,11 @@
                     </a:solidFill>
                   </a:tcPr>
                 </a:tc>
+                <a:extLst>
+                  <a:ext uri="{0D108BD9-81ED-4DB2-BD59-A6C34878D82A}">
+                    <a16:rowId xmlns:a16="http://schemas.microsoft.com/office/drawing/2014/main" val="10002"/>
+                  </a:ext>
+                </a:extLst>
               </a:tr>
               <a:tr h="411480">
                 <a:tc>
@@ -13366,6 +13037,11 @@
                     </a:solidFill>
                   </a:tcPr>
                 </a:tc>
+                <a:extLst>
+                  <a:ext uri="{0D108BD9-81ED-4DB2-BD59-A6C34878D82A}">
+                    <a16:rowId xmlns:a16="http://schemas.microsoft.com/office/drawing/2014/main" val="10003"/>
+                  </a:ext>
+                </a:extLst>
               </a:tr>
               <a:tr h="411480">
                 <a:tc>
@@ -13396,13 +13072,22 @@
                     <a:lstStyle/>
                     <a:p>
                       <a:r>
-                        <a:rPr sz="1250">
+                        <a:rPr sz="1250" dirty="0" err="1">
                           <a:solidFill>
                             <a:srgbClr val="1A1A2E"/>
                           </a:solidFill>
                           <a:latin typeface="Calibri"/>
                         </a:rPr>
-                        <a:t>orchestrator.py plus agents/</a:t>
+                        <a:t>orchestrator.py</a:t>
+                      </a:r>
+                      <a:r>
+                        <a:rPr sz="1250" dirty="0">
+                          <a:solidFill>
+                            <a:srgbClr val="1A1A2E"/>
+                          </a:solidFill>
+                          <a:latin typeface="Calibri"/>
+                        </a:rPr>
+                        <a:t> plus agents/</a:t>
                       </a:r>
                     </a:p>
                   </a:txBody>
@@ -13412,6 +13097,11 @@
                     </a:solidFill>
                   </a:tcPr>
                 </a:tc>
+                <a:extLst>
+                  <a:ext uri="{0D108BD9-81ED-4DB2-BD59-A6C34878D82A}">
+                    <a16:rowId xmlns:a16="http://schemas.microsoft.com/office/drawing/2014/main" val="10004"/>
+                  </a:ext>
+                </a:extLst>
               </a:tr>
             </a:tbl>
           </a:graphicData>
@@ -13458,75 +13148,7 @@
           <a:lstStyle/>
           <a:p>
             <a:pPr algn="ctr"/>
-          </a:p>
-        </p:txBody>
-      </p:sp>
-      <p:sp>
-        <p:nvSpPr>
-          <p:cNvPr id="15" name="TextBox 14"/>
-          <p:cNvSpPr txBox="1"/>
-          <p:nvPr/>
-        </p:nvSpPr>
-        <p:spPr>
-          <a:xfrm>
-            <a:off x="502920" y="6519672"/>
-            <a:ext cx="11155680" cy="310896"/>
-          </a:xfrm>
-          <a:prstGeom prst="rect">
-            <a:avLst/>
-          </a:prstGeom>
-          <a:noFill/>
-        </p:spPr>
-        <p:txBody>
-          <a:bodyPr wrap="square" anchor="ctr">
-            <a:spAutoFit/>
-          </a:bodyPr>
-          <a:lstStyle/>
-          <a:p>
-            <a:pPr algn="l">
-              <a:lnSpc>
-                <a:spcPct val="105000"/>
-              </a:lnSpc>
-              <a:spcAft>
-                <a:spcPts val="600"/>
-              </a:spcAft>
-            </a:pPr>
-            <a:r>
-              <a:rPr sz="1100" b="1">
-                <a:solidFill>
-                  <a:srgbClr val="0A1F6B"/>
-                </a:solidFill>
-                <a:latin typeface="Calibri"/>
-              </a:rPr>
-              <a:t>Rubric: </a:t>
-            </a:r>
-            <a:r>
-              <a:rPr sz="1100" b="0">
-                <a:solidFill>
-                  <a:srgbClr val="555555"/>
-                </a:solidFill>
-                <a:latin typeface="Calibri"/>
-              </a:rPr>
-              <a:t>Architecture (10 pts) + Feasibility (15 pts)</a:t>
-            </a:r>
-            <a:r>
-              <a:rPr sz="1100" b="1">
-                <a:solidFill>
-                  <a:srgbClr val="0A1F6B"/>
-                </a:solidFill>
-                <a:latin typeface="Calibri"/>
-              </a:rPr>
-              <a:t>     |     Handout / docs: </a:t>
-            </a:r>
-            <a:r>
-              <a:rPr sz="1100" b="0">
-                <a:solidFill>
-                  <a:srgbClr val="555555"/>
-                </a:solidFill>
-                <a:latin typeface="Calibri"/>
-              </a:rPr>
-              <a:t>docs/03</a:t>
-            </a:r>
+            <a:endParaRPr/>
           </a:p>
         </p:txBody>
       </p:sp>
@@ -13539,7 +13161,7 @@
 </file>
 
 <file path=ppt/slides/slide9.xml><?xml version="1.0" encoding="utf-8"?>
-<p:sld xmlns:a="http://schemas.openxmlformats.org/drawingml/2006/main" xmlns:p="http://schemas.openxmlformats.org/presentationml/2006/main" xmlns:r="http://schemas.openxmlformats.org/officeDocument/2006/relationships">
+<p:sld xmlns:a="http://schemas.openxmlformats.org/drawingml/2006/main" xmlns:r="http://schemas.openxmlformats.org/officeDocument/2006/relationships" xmlns:p="http://schemas.openxmlformats.org/presentationml/2006/main">
   <p:cSld>
     <p:spTree>
       <p:nvGrpSpPr>
@@ -13547,7 +13169,14 @@
         <p:cNvGrpSpPr/>
         <p:nvPr/>
       </p:nvGrpSpPr>
-      <p:grpSpPr/>
+      <p:grpSpPr>
+        <a:xfrm>
+          <a:off x="0" y="0"/>
+          <a:ext cx="0" cy="0"/>
+          <a:chOff x="0" y="0"/>
+          <a:chExt cx="0" cy="0"/>
+        </a:xfrm>
+      </p:grpSpPr>
       <p:sp>
         <p:nvSpPr>
           <p:cNvPr id="2" name="Rectangle 1"/>
@@ -13589,6 +13218,7 @@
           <a:lstStyle/>
           <a:p>
             <a:pPr algn="ctr"/>
+            <a:endParaRPr/>
           </a:p>
         </p:txBody>
       </p:sp>
@@ -13717,6 +13347,7 @@
           <a:lstStyle/>
           <a:p>
             <a:pPr algn="ctr"/>
+            <a:endParaRPr/>
           </a:p>
         </p:txBody>
       </p:sp>
@@ -14006,6 +13637,7 @@
           <a:lstStyle/>
           <a:p>
             <a:pPr algn="ctr"/>
+            <a:endParaRPr/>
           </a:p>
         </p:txBody>
       </p:sp>
@@ -14101,75 +13733,7 @@
           <a:lstStyle/>
           <a:p>
             <a:pPr algn="ctr"/>
-          </a:p>
-        </p:txBody>
-      </p:sp>
-      <p:sp>
-        <p:nvSpPr>
-          <p:cNvPr id="10" name="TextBox 9"/>
-          <p:cNvSpPr txBox="1"/>
-          <p:nvPr/>
-        </p:nvSpPr>
-        <p:spPr>
-          <a:xfrm>
-            <a:off x="502920" y="6519672"/>
-            <a:ext cx="11155680" cy="310896"/>
-          </a:xfrm>
-          <a:prstGeom prst="rect">
-            <a:avLst/>
-          </a:prstGeom>
-          <a:noFill/>
-        </p:spPr>
-        <p:txBody>
-          <a:bodyPr wrap="square" anchor="ctr">
-            <a:spAutoFit/>
-          </a:bodyPr>
-          <a:lstStyle/>
-          <a:p>
-            <a:pPr algn="l">
-              <a:lnSpc>
-                <a:spcPct val="105000"/>
-              </a:lnSpc>
-              <a:spcAft>
-                <a:spcPts val="600"/>
-              </a:spcAft>
-            </a:pPr>
-            <a:r>
-              <a:rPr sz="1100" b="1">
-                <a:solidFill>
-                  <a:srgbClr val="0A1F6B"/>
-                </a:solidFill>
-                <a:latin typeface="Calibri"/>
-              </a:rPr>
-              <a:t>Rubric: </a:t>
-            </a:r>
-            <a:r>
-              <a:rPr sz="1100" b="0">
-                <a:solidFill>
-                  <a:srgbClr val="555555"/>
-                </a:solidFill>
-                <a:latin typeface="Calibri"/>
-              </a:rPr>
-              <a:t>Agentic Thinking and Autonomy (25 pts)</a:t>
-            </a:r>
-            <a:r>
-              <a:rPr sz="1100" b="1">
-                <a:solidFill>
-                  <a:srgbClr val="0A1F6B"/>
-                </a:solidFill>
-                <a:latin typeface="Calibri"/>
-              </a:rPr>
-              <a:t>     |     Handout / docs: </a:t>
-            </a:r>
-            <a:r>
-              <a:rPr sz="1100" b="0">
-                <a:solidFill>
-                  <a:srgbClr val="555555"/>
-                </a:solidFill>
-                <a:latin typeface="Calibri"/>
-              </a:rPr>
-              <a:t>Handout 7 | docs/02 sec 7, docs/05</a:t>
-            </a:r>
+            <a:endParaRPr/>
           </a:p>
         </p:txBody>
       </p:sp>
@@ -14512,44 +14076,44 @@
         <a:sysClr val="window" lastClr="FFFFFF"/>
       </a:lt1>
       <a:dk2>
-        <a:srgbClr val="1F497D"/>
+        <a:srgbClr val="0E2841"/>
       </a:dk2>
       <a:lt2>
-        <a:srgbClr val="EEECE1"/>
+        <a:srgbClr val="E8E8E8"/>
       </a:lt2>
       <a:accent1>
-        <a:srgbClr val="4F81BD"/>
+        <a:srgbClr val="156082"/>
       </a:accent1>
       <a:accent2>
-        <a:srgbClr val="C0504D"/>
+        <a:srgbClr val="E97132"/>
       </a:accent2>
       <a:accent3>
-        <a:srgbClr val="9BBB59"/>
+        <a:srgbClr val="196B24"/>
       </a:accent3>
       <a:accent4>
-        <a:srgbClr val="8064A2"/>
+        <a:srgbClr val="0F9ED5"/>
       </a:accent4>
       <a:accent5>
-        <a:srgbClr val="4BACC6"/>
+        <a:srgbClr val="A02B93"/>
       </a:accent5>
       <a:accent6>
-        <a:srgbClr val="F79646"/>
+        <a:srgbClr val="4EA72E"/>
       </a:accent6>
       <a:hlink>
-        <a:srgbClr val="0000FF"/>
+        <a:srgbClr val="467886"/>
       </a:hlink>
       <a:folHlink>
-        <a:srgbClr val="800080"/>
+        <a:srgbClr val="96607D"/>
       </a:folHlink>
     </a:clrScheme>
     <a:fontScheme name="Office">
       <a:majorFont>
-        <a:latin typeface="Calibri"/>
+        <a:latin typeface="Aptos Display" panose="02110004020202020204"/>
         <a:ea typeface=""/>
         <a:cs typeface=""/>
-        <a:font script="Jpan" typeface="ＭＳ Ｐゴシック"/>
+        <a:font script="Jpan" typeface="游ゴシック Light"/>
         <a:font script="Hang" typeface="맑은 고딕"/>
-        <a:font script="Hans" typeface="宋体"/>
+        <a:font script="Hans" typeface="等线 Light"/>
         <a:font script="Hant" typeface="新細明體"/>
         <a:font script="Arab" typeface="Times New Roman"/>
         <a:font script="Hebr" typeface="Times New Roman"/>
@@ -14577,14 +14141,31 @@
         <a:font script="Viet" typeface="Times New Roman"/>
         <a:font script="Uigh" typeface="Microsoft Uighur"/>
         <a:font script="Geor" typeface="Sylfaen"/>
+        <a:font script="Armn" typeface="Arial"/>
+        <a:font script="Bugi" typeface="Leelawadee UI"/>
+        <a:font script="Bopo" typeface="Microsoft JhengHei"/>
+        <a:font script="Java" typeface="Javanese Text"/>
+        <a:font script="Lisu" typeface="Segoe UI"/>
+        <a:font script="Mymr" typeface="Myanmar Text"/>
+        <a:font script="Nkoo" typeface="Ebrima"/>
+        <a:font script="Olck" typeface="Nirmala UI"/>
+        <a:font script="Osma" typeface="Ebrima"/>
+        <a:font script="Phag" typeface="Phagspa"/>
+        <a:font script="Syrn" typeface="Estrangelo Edessa"/>
+        <a:font script="Syrj" typeface="Estrangelo Edessa"/>
+        <a:font script="Syre" typeface="Estrangelo Edessa"/>
+        <a:font script="Sora" typeface="Nirmala UI"/>
+        <a:font script="Tale" typeface="Microsoft Tai Le"/>
+        <a:font script="Talu" typeface="Microsoft New Tai Lue"/>
+        <a:font script="Tfng" typeface="Ebrima"/>
       </a:majorFont>
       <a:minorFont>
-        <a:latin typeface="Calibri"/>
+        <a:latin typeface="Aptos" panose="02110004020202020204"/>
         <a:ea typeface=""/>
         <a:cs typeface=""/>
-        <a:font script="Jpan" typeface="ＭＳ Ｐゴシック"/>
+        <a:font script="Jpan" typeface="游ゴシック"/>
         <a:font script="Hang" typeface="맑은 고딕"/>
-        <a:font script="Hans" typeface="宋体"/>
+        <a:font script="Hans" typeface="等线"/>
         <a:font script="Hant" typeface="新細明體"/>
         <a:font script="Arab" typeface="Arial"/>
         <a:font script="Hebr" typeface="Arial"/>
@@ -14612,6 +14193,23 @@
         <a:font script="Viet" typeface="Arial"/>
         <a:font script="Uigh" typeface="Microsoft Uighur"/>
         <a:font script="Geor" typeface="Sylfaen"/>
+        <a:font script="Armn" typeface="Arial"/>
+        <a:font script="Bugi" typeface="Leelawadee UI"/>
+        <a:font script="Bopo" typeface="Microsoft JhengHei"/>
+        <a:font script="Java" typeface="Javanese Text"/>
+        <a:font script="Lisu" typeface="Segoe UI"/>
+        <a:font script="Mymr" typeface="Myanmar Text"/>
+        <a:font script="Nkoo" typeface="Ebrima"/>
+        <a:font script="Olck" typeface="Nirmala UI"/>
+        <a:font script="Osma" typeface="Ebrima"/>
+        <a:font script="Phag" typeface="Phagspa"/>
+        <a:font script="Syrn" typeface="Estrangelo Edessa"/>
+        <a:font script="Syrj" typeface="Estrangelo Edessa"/>
+        <a:font script="Syre" typeface="Estrangelo Edessa"/>
+        <a:font script="Sora" typeface="Nirmala UI"/>
+        <a:font script="Tale" typeface="Microsoft Tai Le"/>
+        <a:font script="Talu" typeface="Microsoft New Tai Lue"/>
+        <a:font script="Tfng" typeface="Ebrima"/>
       </a:minorFont>
     </a:fontScheme>
     <a:fmtScheme name="Office">
@@ -14623,180 +14221,136 @@
           <a:gsLst>
             <a:gs pos="0">
               <a:schemeClr val="phClr">
-                <a:tint val="50000"/>
-                <a:satMod val="300000"/>
+                <a:lumMod val="110000"/>
+                <a:satMod val="105000"/>
+                <a:tint val="67000"/>
               </a:schemeClr>
             </a:gs>
-            <a:gs pos="35000">
+            <a:gs pos="50000">
               <a:schemeClr val="phClr">
-                <a:tint val="37000"/>
-                <a:satMod val="300000"/>
+                <a:lumMod val="105000"/>
+                <a:satMod val="103000"/>
+                <a:tint val="73000"/>
               </a:schemeClr>
             </a:gs>
             <a:gs pos="100000">
               <a:schemeClr val="phClr">
-                <a:tint val="15000"/>
-                <a:satMod val="350000"/>
+                <a:lumMod val="105000"/>
+                <a:satMod val="109000"/>
+                <a:tint val="81000"/>
               </a:schemeClr>
             </a:gs>
           </a:gsLst>
-          <a:lin ang="16200000" scaled="1"/>
+          <a:lin ang="5400000" scaled="0"/>
         </a:gradFill>
         <a:gradFill rotWithShape="1">
           <a:gsLst>
             <a:gs pos="0">
               <a:schemeClr val="phClr">
-                <a:tint val="100000"/>
+                <a:satMod val="103000"/>
+                <a:lumMod val="102000"/>
+                <a:tint val="94000"/>
+              </a:schemeClr>
+            </a:gs>
+            <a:gs pos="50000">
+              <a:schemeClr val="phClr">
+                <a:satMod val="110000"/>
+                <a:lumMod val="100000"/>
                 <a:shade val="100000"/>
-                <a:satMod val="130000"/>
               </a:schemeClr>
             </a:gs>
             <a:gs pos="100000">
               <a:schemeClr val="phClr">
-                <a:tint val="50000"/>
-                <a:shade val="100000"/>
-                <a:satMod val="350000"/>
+                <a:lumMod val="99000"/>
+                <a:satMod val="120000"/>
+                <a:shade val="78000"/>
               </a:schemeClr>
             </a:gs>
           </a:gsLst>
-          <a:lin ang="16200000" scaled="0"/>
+          <a:lin ang="5400000" scaled="0"/>
         </a:gradFill>
       </a:fillStyleLst>
       <a:lnStyleLst>
-        <a:ln w="9525" cap="flat" cmpd="sng" algn="ctr">
+        <a:ln w="12700" cap="flat" cmpd="sng" algn="ctr">
           <a:solidFill>
-            <a:schemeClr val="phClr">
-              <a:shade val="95000"/>
-              <a:satMod val="105000"/>
-            </a:schemeClr>
+            <a:schemeClr val="phClr"/>
           </a:solidFill>
           <a:prstDash val="solid"/>
+          <a:miter lim="800000"/>
+        </a:ln>
+        <a:ln w="19050" cap="flat" cmpd="sng" algn="ctr">
+          <a:solidFill>
+            <a:schemeClr val="phClr"/>
+          </a:solidFill>
+          <a:prstDash val="solid"/>
+          <a:miter lim="800000"/>
         </a:ln>
         <a:ln w="25400" cap="flat" cmpd="sng" algn="ctr">
           <a:solidFill>
             <a:schemeClr val="phClr"/>
           </a:solidFill>
           <a:prstDash val="solid"/>
-        </a:ln>
-        <a:ln w="38100" cap="flat" cmpd="sng" algn="ctr">
-          <a:solidFill>
-            <a:schemeClr val="phClr"/>
-          </a:solidFill>
-          <a:prstDash val="solid"/>
+          <a:miter lim="800000"/>
         </a:ln>
       </a:lnStyleLst>
       <a:effectStyleLst>
         <a:effectStyle>
+          <a:effectLst/>
+        </a:effectStyle>
+        <a:effectStyle>
+          <a:effectLst/>
+        </a:effectStyle>
+        <a:effectStyle>
           <a:effectLst>
-            <a:outerShdw blurRad="40000" dist="20000" dir="5400000" rotWithShape="0">
+            <a:outerShdw blurRad="57150" dist="19050" dir="5400000" algn="ctr" rotWithShape="0">
               <a:srgbClr val="000000">
-                <a:alpha val="38000"/>
+                <a:alpha val="63000"/>
               </a:srgbClr>
             </a:outerShdw>
           </a:effectLst>
-        </a:effectStyle>
-        <a:effectStyle>
-          <a:effectLst>
-            <a:outerShdw blurRad="40000" dist="23000" dir="5400000" rotWithShape="0">
-              <a:srgbClr val="000000">
-                <a:alpha val="35000"/>
-              </a:srgbClr>
-            </a:outerShdw>
-          </a:effectLst>
-        </a:effectStyle>
-        <a:effectStyle>
-          <a:effectLst>
-            <a:outerShdw blurRad="40000" dist="23000" dir="5400000" rotWithShape="0">
-              <a:srgbClr val="000000">
-                <a:alpha val="35000"/>
-              </a:srgbClr>
-            </a:outerShdw>
-          </a:effectLst>
-          <a:scene3d>
-            <a:camera prst="orthographicFront">
-              <a:rot lat="0" lon="0" rev="0"/>
-            </a:camera>
-            <a:lightRig rig="threePt" dir="t">
-              <a:rot lat="0" lon="0" rev="1200000"/>
-            </a:lightRig>
-          </a:scene3d>
-          <a:sp3d>
-            <a:bevelT w="63500" h="25400"/>
-          </a:sp3d>
         </a:effectStyle>
       </a:effectStyleLst>
       <a:bgFillStyleLst>
         <a:solidFill>
           <a:schemeClr val="phClr"/>
         </a:solidFill>
+        <a:solidFill>
+          <a:schemeClr val="phClr">
+            <a:tint val="95000"/>
+            <a:satMod val="170000"/>
+          </a:schemeClr>
+        </a:solidFill>
         <a:gradFill rotWithShape="1">
           <a:gsLst>
             <a:gs pos="0">
               <a:schemeClr val="phClr">
-                <a:tint val="40000"/>
-                <a:satMod val="350000"/>
+                <a:tint val="93000"/>
+                <a:satMod val="150000"/>
+                <a:shade val="98000"/>
+                <a:lumMod val="102000"/>
               </a:schemeClr>
             </a:gs>
-            <a:gs pos="40000">
+            <a:gs pos="50000">
               <a:schemeClr val="phClr">
-                <a:tint val="45000"/>
-                <a:shade val="99000"/>
-                <a:satMod val="350000"/>
+                <a:tint val="98000"/>
+                <a:satMod val="130000"/>
+                <a:shade val="90000"/>
+                <a:lumMod val="103000"/>
               </a:schemeClr>
             </a:gs>
             <a:gs pos="100000">
               <a:schemeClr val="phClr">
-                <a:shade val="20000"/>
-                <a:satMod val="255000"/>
+                <a:shade val="63000"/>
+                <a:satMod val="120000"/>
               </a:schemeClr>
             </a:gs>
           </a:gsLst>
-          <a:path path="circle">
-            <a:fillToRect l="50000" t="-80000" r="50000" b="180000"/>
-          </a:path>
-        </a:gradFill>
-        <a:gradFill rotWithShape="1">
-          <a:gsLst>
-            <a:gs pos="0">
-              <a:schemeClr val="phClr">
-                <a:tint val="80000"/>
-                <a:satMod val="300000"/>
-              </a:schemeClr>
-            </a:gs>
-            <a:gs pos="100000">
-              <a:schemeClr val="phClr">
-                <a:shade val="30000"/>
-                <a:satMod val="200000"/>
-              </a:schemeClr>
-            </a:gs>
-          </a:gsLst>
-          <a:path path="circle">
-            <a:fillToRect l="50000" t="50000" r="50000" b="50000"/>
-          </a:path>
+          <a:lin ang="5400000" scaled="0"/>
         </a:gradFill>
       </a:bgFillStyleLst>
     </a:fmtScheme>
   </a:themeElements>
   <a:objectDefaults>
-    <a:spDef>
-      <a:spPr/>
-      <a:bodyPr/>
-      <a:lstStyle/>
-      <a:style>
-        <a:lnRef idx="1">
-          <a:schemeClr val="accent1"/>
-        </a:lnRef>
-        <a:fillRef idx="3">
-          <a:schemeClr val="accent1"/>
-        </a:fillRef>
-        <a:effectRef idx="2">
-          <a:schemeClr val="accent1"/>
-        </a:effectRef>
-        <a:fontRef idx="minor">
-          <a:schemeClr val="lt1"/>
-        </a:fontRef>
-      </a:style>
-    </a:spDef>
     <a:lnDef>
       <a:spPr/>
       <a:bodyPr/>
@@ -14818,5 +14372,10 @@
     </a:lnDef>
   </a:objectDefaults>
   <a:extraClrSchemeLst/>
+  <a:extLst>
+    <a:ext uri="{05A4C25C-085E-4340-85A3-A5531E510DB2}">
+      <thm15:themeFamily xmlns:thm15="http://schemas.microsoft.com/office/thememl/2012/main" name="Office Theme" id="{2E142A2C-CD16-42D6-873A-C26D2A0506FA}" vid="{1BDDFF52-6CD6-40A5-AB3C-68EB2F1E4D0A}"/>
+    </a:ext>
+  </a:extLst>
 </a:theme>
 </file>
--- a/presentation/Supply_Chain_Sentinel_Design.pptx
+++ b/presentation/Supply_Chain_Sentinel_Design.pptx
@@ -1281,7 +1281,7 @@
           <a:p>
             <a:fld id="{5BCAD085-E8A6-8845-BD4E-CB4CCA059FC4}" type="datetimeFigureOut">
               <a:rPr lang="en-US" smtClean="0"/>
-              <a:t>6/24/26</a:t>
+              <a:t>6/30/26</a:t>
             </a:fld>
             <a:endParaRPr lang="en-US"/>
           </a:p>
@@ -1449,7 +1449,7 @@
           <a:p>
             <a:fld id="{5BCAD085-E8A6-8845-BD4E-CB4CCA059FC4}" type="datetimeFigureOut">
               <a:rPr lang="en-US" smtClean="0"/>
-              <a:t>6/24/26</a:t>
+              <a:t>6/30/26</a:t>
             </a:fld>
             <a:endParaRPr lang="en-US"/>
           </a:p>
@@ -1627,7 +1627,7 @@
           <a:p>
             <a:fld id="{5BCAD085-E8A6-8845-BD4E-CB4CCA059FC4}" type="datetimeFigureOut">
               <a:rPr lang="en-US" smtClean="0"/>
-              <a:t>6/24/26</a:t>
+              <a:t>6/30/26</a:t>
             </a:fld>
             <a:endParaRPr lang="en-US"/>
           </a:p>
@@ -1795,7 +1795,7 @@
           <a:p>
             <a:fld id="{5BCAD085-E8A6-8845-BD4E-CB4CCA059FC4}" type="datetimeFigureOut">
               <a:rPr lang="en-US" smtClean="0"/>
-              <a:t>6/24/26</a:t>
+              <a:t>6/30/26</a:t>
             </a:fld>
             <a:endParaRPr lang="en-US"/>
           </a:p>
@@ -2040,7 +2040,7 @@
           <a:p>
             <a:fld id="{5BCAD085-E8A6-8845-BD4E-CB4CCA059FC4}" type="datetimeFigureOut">
               <a:rPr lang="en-US" smtClean="0"/>
-              <a:t>6/24/26</a:t>
+              <a:t>6/30/26</a:t>
             </a:fld>
             <a:endParaRPr lang="en-US"/>
           </a:p>
@@ -2325,7 +2325,7 @@
           <a:p>
             <a:fld id="{5BCAD085-E8A6-8845-BD4E-CB4CCA059FC4}" type="datetimeFigureOut">
               <a:rPr lang="en-US" smtClean="0"/>
-              <a:t>6/24/26</a:t>
+              <a:t>6/30/26</a:t>
             </a:fld>
             <a:endParaRPr lang="en-US"/>
           </a:p>
@@ -2744,7 +2744,7 @@
           <a:p>
             <a:fld id="{5BCAD085-E8A6-8845-BD4E-CB4CCA059FC4}" type="datetimeFigureOut">
               <a:rPr lang="en-US" smtClean="0"/>
-              <a:t>6/24/26</a:t>
+              <a:t>6/30/26</a:t>
             </a:fld>
             <a:endParaRPr lang="en-US"/>
           </a:p>
@@ -2861,7 +2861,7 @@
           <a:p>
             <a:fld id="{5BCAD085-E8A6-8845-BD4E-CB4CCA059FC4}" type="datetimeFigureOut">
               <a:rPr lang="en-US" smtClean="0"/>
-              <a:t>6/24/26</a:t>
+              <a:t>6/30/26</a:t>
             </a:fld>
             <a:endParaRPr lang="en-US"/>
           </a:p>
@@ -2956,7 +2956,7 @@
           <a:p>
             <a:fld id="{5BCAD085-E8A6-8845-BD4E-CB4CCA059FC4}" type="datetimeFigureOut">
               <a:rPr lang="en-US" smtClean="0"/>
-              <a:t>6/24/26</a:t>
+              <a:t>6/30/26</a:t>
             </a:fld>
             <a:endParaRPr lang="en-US"/>
           </a:p>
@@ -3231,7 +3231,7 @@
           <a:p>
             <a:fld id="{5BCAD085-E8A6-8845-BD4E-CB4CCA059FC4}" type="datetimeFigureOut">
               <a:rPr lang="en-US" smtClean="0"/>
-              <a:t>6/24/26</a:t>
+              <a:t>6/30/26</a:t>
             </a:fld>
             <a:endParaRPr lang="en-US"/>
           </a:p>
@@ -3483,7 +3483,7 @@
           <a:p>
             <a:fld id="{5BCAD085-E8A6-8845-BD4E-CB4CCA059FC4}" type="datetimeFigureOut">
               <a:rPr lang="en-US" smtClean="0"/>
-              <a:t>6/24/26</a:t>
+              <a:t>6/30/26</a:t>
             </a:fld>
             <a:endParaRPr lang="en-US"/>
           </a:p>
@@ -3694,7 +3694,7 @@
           <a:p>
             <a:fld id="{5BCAD085-E8A6-8845-BD4E-CB4CCA059FC4}" type="datetimeFigureOut">
               <a:rPr lang="en-US" smtClean="0"/>
-              <a:t>6/24/26</a:t>
+              <a:t>6/30/26</a:t>
             </a:fld>
             <a:endParaRPr lang="en-US"/>
           </a:p>
@@ -13185,7 +13185,7 @@
         </p:nvSpPr>
         <p:spPr>
           <a:xfrm>
-            <a:off x="0" y="0"/>
+            <a:off x="0" y="237744"/>
             <a:ext cx="292608" cy="6858000"/>
           </a:xfrm>
           <a:prstGeom prst="rect">
@@ -13649,8 +13649,8 @@
         </p:nvSpPr>
         <p:spPr>
           <a:xfrm>
-            <a:off x="731520" y="5532120"/>
-            <a:ext cx="10698480" cy="685800"/>
+            <a:off x="731520" y="5568750"/>
+            <a:ext cx="10698480" cy="612540"/>
           </a:xfrm>
           <a:prstGeom prst="rect">
             <a:avLst/>
@@ -13672,7 +13672,7 @@
               </a:spcAft>
             </a:pPr>
             <a:r>
-              <a:rPr sz="1400" b="1">
+              <a:rPr sz="1400" b="1" dirty="0">
                 <a:solidFill>
                   <a:srgbClr val="6CB400"/>
                 </a:solidFill>
@@ -13681,14 +13681,76 @@
               <a:t>Outcome: </a:t>
             </a:r>
             <a:r>
-              <a:rPr sz="1400" b="0">
+              <a:rPr sz="1400" b="0" dirty="0">
                 <a:solidFill>
                   <a:srgbClr val="FFFFFF"/>
                 </a:solidFill>
                 <a:latin typeface="Calibri"/>
               </a:rPr>
-              <a:t>a CRITICAL risk caught about three weeks before the line would stop, with a committed plan and a full audit trail. Runs live: python run_demo.py --slow.</a:t>
-            </a:r>
+              <a:t>a CRITICAL risk caught about three weeks before the line would stop, with a committed plan and a full audit trail. </a:t>
+            </a:r>
+            <a:endParaRPr lang="de-CH" sz="1400" b="0" dirty="0">
+              <a:solidFill>
+                <a:srgbClr val="FFFFFF"/>
+              </a:solidFill>
+              <a:latin typeface="Calibri"/>
+            </a:endParaRPr>
+          </a:p>
+          <a:p>
+            <a:pPr>
+              <a:lnSpc>
+                <a:spcPct val="105000"/>
+              </a:lnSpc>
+              <a:spcAft>
+                <a:spcPts val="600"/>
+              </a:spcAft>
+            </a:pPr>
+            <a:r>
+              <a:rPr lang="de-CH" sz="1400" dirty="0">
+                <a:solidFill>
+                  <a:srgbClr val="FFFFFF"/>
+                </a:solidFill>
+              </a:rPr>
+              <a:t>App: https://</a:t>
+            </a:r>
+            <a:r>
+              <a:rPr lang="de-CH" sz="1400" dirty="0" err="1">
+                <a:solidFill>
+                  <a:srgbClr val="FFFFFF"/>
+                </a:solidFill>
+              </a:rPr>
+              <a:t>agentic</a:t>
+            </a:r>
+            <a:r>
+              <a:rPr lang="de-CH" sz="1400" dirty="0">
+                <a:solidFill>
+                  <a:srgbClr val="FFFFFF"/>
+                </a:solidFill>
+              </a:rPr>
+              <a:t>-ai-</a:t>
+            </a:r>
+            <a:r>
+              <a:rPr lang="de-CH" sz="1400" dirty="0" err="1">
+                <a:solidFill>
+                  <a:srgbClr val="FFFFFF"/>
+                </a:solidFill>
+              </a:rPr>
+              <a:t>sentinel.streamlit.app</a:t>
+            </a:r>
+            <a:r>
+              <a:rPr lang="de-CH" sz="1400" dirty="0">
+                <a:solidFill>
+                  <a:srgbClr val="FFFFFF"/>
+                </a:solidFill>
+              </a:rPr>
+              <a:t>/</a:t>
+            </a:r>
+            <a:endParaRPr sz="1400" b="0" dirty="0">
+              <a:solidFill>
+                <a:srgbClr val="FFFFFF"/>
+              </a:solidFill>
+              <a:latin typeface="Calibri"/>
+            </a:endParaRPr>
           </a:p>
         </p:txBody>
       </p:sp>

--- a/presentation/Supply_Chain_Sentinel_Design.pptx
+++ b/presentation/Supply_Chain_Sentinel_Design.pptx
@@ -4859,7 +4859,7 @@
                     <a:lstStyle/>
                     <a:p>
                       <a:r>
-                        <a:rPr sz="1300">
+                        <a:rPr sz="1300" dirty="0">
                           <a:solidFill>
                             <a:srgbClr val="1A1A2E"/>
                           </a:solidFill>
@@ -4910,7 +4910,7 @@
                     <a:lstStyle/>
                     <a:p>
                       <a:r>
-                        <a:rPr sz="1300">
+                        <a:rPr sz="1300" dirty="0">
                           <a:solidFill>
                             <a:srgbClr val="1A1A2E"/>
                           </a:solidFill>
@@ -4932,7 +4932,7 @@
                     <a:lstStyle/>
                     <a:p>
                       <a:r>
-                        <a:rPr sz="1300">
+                        <a:rPr sz="1300" dirty="0">
                           <a:solidFill>
                             <a:srgbClr val="1A1A2E"/>
                           </a:solidFill>
@@ -5034,7 +5034,7 @@
               </a:spcAft>
             </a:pPr>
             <a:r>
-              <a:rPr sz="1400" b="1">
+              <a:rPr sz="1400" b="1" dirty="0">
                 <a:solidFill>
                   <a:srgbClr val="C02A2A"/>
                 </a:solidFill>
@@ -5043,7 +5043,7 @@
               <a:t>Human-in-the-loop: </a:t>
             </a:r>
             <a:r>
-              <a:rPr sz="1400" b="0">
+              <a:rPr sz="1400" b="0" dirty="0">
                 <a:solidFill>
                   <a:srgbClr val="1A1A2E"/>
                 </a:solidFill>
@@ -5609,7 +5609,7 @@
                     <a:lstStyle/>
                     <a:p>
                       <a:r>
-                        <a:rPr sz="1200">
+                        <a:rPr sz="1200" dirty="0">
                           <a:solidFill>
                             <a:srgbClr val="1A1A2E"/>
                           </a:solidFill>
@@ -5755,7 +5755,7 @@
                     <a:lstStyle/>
                     <a:p>
                       <a:r>
-                        <a:rPr sz="1200">
+                        <a:rPr sz="1200" dirty="0">
                           <a:solidFill>
                             <a:srgbClr val="1A1A2E"/>
                           </a:solidFill>
@@ -6989,7 +6989,7 @@
               </a:spcAft>
             </a:pPr>
             <a:r>
-              <a:rPr sz="1500" b="1">
+              <a:rPr sz="1500" b="1" dirty="0">
                 <a:solidFill>
                   <a:srgbClr val="0E7C86"/>
                 </a:solidFill>
@@ -6998,7 +6998,7 @@
               <a:t>•  </a:t>
             </a:r>
             <a:r>
-              <a:rPr sz="1500" b="0">
+              <a:rPr sz="1500" b="0" dirty="0">
                 <a:solidFill>
                   <a:srgbClr val="1A1A2E"/>
                 </a:solidFill>
@@ -7017,7 +7017,7 @@
               </a:spcAft>
             </a:pPr>
             <a:r>
-              <a:rPr sz="1500" b="1">
+              <a:rPr sz="1500" b="1" dirty="0">
                 <a:solidFill>
                   <a:srgbClr val="0E7C86"/>
                 </a:solidFill>
@@ -7026,7 +7026,7 @@
               <a:t>•  </a:t>
             </a:r>
             <a:r>
-              <a:rPr sz="1500" b="0">
+              <a:rPr sz="1500" b="0" dirty="0">
                 <a:solidFill>
                   <a:srgbClr val="1A1A2E"/>
                 </a:solidFill>
@@ -7045,7 +7045,7 @@
               </a:spcAft>
             </a:pPr>
             <a:r>
-              <a:rPr sz="1500" b="1">
+              <a:rPr sz="1500" b="1" dirty="0">
                 <a:solidFill>
                   <a:srgbClr val="0E7C86"/>
                 </a:solidFill>
@@ -7054,7 +7054,7 @@
               <a:t>•  </a:t>
             </a:r>
             <a:r>
-              <a:rPr sz="1500" b="0">
+              <a:rPr sz="1500" b="0" dirty="0">
                 <a:solidFill>
                   <a:srgbClr val="1A1A2E"/>
                 </a:solidFill>
@@ -7525,7 +7525,7 @@
                     <a:lstStyle/>
                     <a:p>
                       <a:r>
-                        <a:rPr sz="1300">
+                        <a:rPr sz="1300" dirty="0">
                           <a:solidFill>
                             <a:srgbClr val="1A1A2E"/>
                           </a:solidFill>
@@ -8267,7 +8267,7 @@
               </a:spcAft>
             </a:pPr>
             <a:r>
-              <a:rPr sz="1500" b="1">
+              <a:rPr sz="1500" b="1" dirty="0">
                 <a:solidFill>
                   <a:srgbClr val="FFFFFF"/>
                 </a:solidFill>
@@ -8286,7 +8286,7 @@
               </a:spcAft>
             </a:pPr>
             <a:r>
-              <a:rPr sz="1100" b="0">
+              <a:rPr sz="1100" b="0" dirty="0">
                 <a:solidFill>
                   <a:srgbClr val="CFDAF0"/>
                 </a:solidFill>
@@ -8839,13 +8839,31 @@
               </a:spcAft>
             </a:pPr>
             <a:r>
-              <a:rPr sz="1200" b="1">
+              <a:rPr sz="1200" b="1" dirty="0">
                 <a:solidFill>
                   <a:srgbClr val="FFFFFF"/>
                 </a:solidFill>
                 <a:latin typeface="Calibri"/>
               </a:rPr>
-              <a:t>MCP tool layer  (standardised connectors, * = requires human approval)</a:t>
+              <a:t>MCP tool layer  (</a:t>
+            </a:r>
+            <a:r>
+              <a:rPr sz="1200" b="1" dirty="0" err="1">
+                <a:solidFill>
+                  <a:srgbClr val="FFFFFF"/>
+                </a:solidFill>
+                <a:latin typeface="Calibri"/>
+              </a:rPr>
+              <a:t>standardised</a:t>
+            </a:r>
+            <a:r>
+              <a:rPr sz="1200" b="1" dirty="0">
+                <a:solidFill>
+                  <a:srgbClr val="FFFFFF"/>
+                </a:solidFill>
+                <a:latin typeface="Calibri"/>
+              </a:rPr>
+              <a:t> connectors, * = requires human approval)</a:t>
             </a:r>
           </a:p>
         </p:txBody>
@@ -9685,7 +9703,7 @@
                     <a:lstStyle/>
                     <a:p>
                       <a:r>
-                        <a:rPr sz="1300">
+                        <a:rPr sz="1300" dirty="0">
                           <a:solidFill>
                             <a:srgbClr val="1A1A2E"/>
                           </a:solidFill>
@@ -9736,7 +9754,7 @@
                     <a:lstStyle/>
                     <a:p>
                       <a:r>
-                        <a:rPr sz="1300">
+                        <a:rPr sz="1300" dirty="0">
                           <a:solidFill>
                             <a:srgbClr val="1A1A2E"/>
                           </a:solidFill>
@@ -9809,7 +9827,7 @@
                     <a:lstStyle/>
                     <a:p>
                       <a:r>
-                        <a:rPr sz="1300">
+                        <a:rPr sz="1300" dirty="0">
                           <a:solidFill>
                             <a:srgbClr val="1A1A2E"/>
                           </a:solidFill>
@@ -9955,7 +9973,7 @@
               </a:spcAft>
             </a:pPr>
             <a:r>
-              <a:rPr sz="1400" b="1">
+              <a:rPr sz="1400" b="1" dirty="0">
                 <a:solidFill>
                   <a:srgbClr val="0E7C86"/>
                 </a:solidFill>
@@ -9964,7 +9982,7 @@
               <a:t>Trade-off we accept: </a:t>
             </a:r>
             <a:r>
-              <a:rPr sz="1400" b="0">
+              <a:rPr sz="1400" b="0" dirty="0">
                 <a:solidFill>
                   <a:srgbClr val="1A1A2E"/>
                 </a:solidFill>
@@ -11504,7 +11522,7 @@
               </a:spcAft>
             </a:pPr>
             <a:r>
-              <a:rPr sz="2700" b="1">
+              <a:rPr sz="2700" b="1" dirty="0">
                 <a:solidFill>
                   <a:srgbClr val="0A1F6B"/>
                 </a:solidFill>
@@ -12065,7 +12083,7 @@
               </a:spcAft>
             </a:pPr>
             <a:r>
-              <a:rPr sz="1400" b="0">
+              <a:rPr sz="1400" b="0" dirty="0">
                 <a:solidFill>
                   <a:srgbClr val="1A1A2E"/>
                 </a:solidFill>
@@ -12129,8 +12147,8 @@
         </p:nvSpPr>
         <p:spPr>
           <a:xfrm>
-            <a:off x="731520" y="5943600"/>
-            <a:ext cx="10698480" cy="457200"/>
+            <a:off x="731520" y="6021357"/>
+            <a:ext cx="10698480" cy="301686"/>
           </a:xfrm>
           <a:prstGeom prst="rect">
             <a:avLst/>
@@ -12152,13 +12170,31 @@
               </a:spcAft>
             </a:pPr>
             <a:r>
-              <a:rPr sz="1350" b="1">
+              <a:rPr lang="de-CH" sz="1350" b="1" dirty="0">
                 <a:solidFill>
                   <a:srgbClr val="FFFFFF"/>
                 </a:solidFill>
                 <a:latin typeface="Calibri"/>
               </a:rPr>
-              <a:t>Course caveat: agents do not self-learn for free; improvement comes from curated feedback.</a:t>
+              <a:t>Honest </a:t>
+            </a:r>
+            <a:r>
+              <a:rPr lang="de-CH" sz="1350" b="1" dirty="0" err="1">
+                <a:solidFill>
+                  <a:srgbClr val="FFFFFF"/>
+                </a:solidFill>
+                <a:latin typeface="Calibri"/>
+              </a:rPr>
+              <a:t>note</a:t>
+            </a:r>
+            <a:r>
+              <a:rPr sz="1350" b="1" dirty="0">
+                <a:solidFill>
+                  <a:srgbClr val="FFFFFF"/>
+                </a:solidFill>
+                <a:latin typeface="Calibri"/>
+              </a:rPr>
+              <a:t>: agents do not self-learn for free; improvement comes from curated feedback.</a:t>
             </a:r>
           </a:p>
         </p:txBody>
@@ -12205,6 +12241,72 @@
           <a:p>
             <a:pPr algn="ctr"/>
             <a:endParaRPr/>
+          </a:p>
+        </p:txBody>
+      </p:sp>
+      <p:sp>
+        <p:nvSpPr>
+          <p:cNvPr id="21" name="TextBox 20">
+            <a:extLst>
+              <a:ext uri="{FF2B5EF4-FFF2-40B4-BE49-F238E27FC236}">
+                <a16:creationId xmlns:a16="http://schemas.microsoft.com/office/drawing/2014/main" id="{58ED9C19-BBA9-CC95-C440-836EFDCBA423}"/>
+              </a:ext>
+            </a:extLst>
+          </p:cNvPr>
+          <p:cNvSpPr txBox="1"/>
+          <p:nvPr/>
+        </p:nvSpPr>
+        <p:spPr>
+          <a:xfrm>
+            <a:off x="883920" y="6173757"/>
+            <a:ext cx="10698480" cy="301686"/>
+          </a:xfrm>
+          <a:prstGeom prst="rect">
+            <a:avLst/>
+          </a:prstGeom>
+          <a:noFill/>
+        </p:spPr>
+        <p:txBody>
+          <a:bodyPr wrap="square" anchor="ctr">
+            <a:spAutoFit/>
+          </a:bodyPr>
+          <a:lstStyle/>
+          <a:p>
+            <a:pPr algn="l">
+              <a:lnSpc>
+                <a:spcPct val="105000"/>
+              </a:lnSpc>
+              <a:spcAft>
+                <a:spcPts val="600"/>
+              </a:spcAft>
+            </a:pPr>
+            <a:r>
+              <a:rPr lang="de-CH" sz="1350" b="1" dirty="0">
+                <a:solidFill>
+                  <a:srgbClr val="FFFFFF"/>
+                </a:solidFill>
+                <a:latin typeface="Calibri"/>
+              </a:rPr>
+              <a:t>Honest </a:t>
+            </a:r>
+            <a:r>
+              <a:rPr lang="de-CH" sz="1350" b="1" dirty="0" err="1">
+                <a:solidFill>
+                  <a:srgbClr val="FFFFFF"/>
+                </a:solidFill>
+                <a:latin typeface="Calibri"/>
+              </a:rPr>
+              <a:t>note</a:t>
+            </a:r>
+            <a:r>
+              <a:rPr sz="1350" b="1" dirty="0">
+                <a:solidFill>
+                  <a:srgbClr val="FFFFFF"/>
+                </a:solidFill>
+                <a:latin typeface="Calibri"/>
+              </a:rPr>
+              <a:t>: agents do not self-learn for free; improvement comes from curated feedback.</a:t>
+            </a:r>
           </a:p>
         </p:txBody>
       </p:sp>
